--- a/yocto_training_all_session_decks/session_decks/D4S2_Boot_Flash_Verify.pptx
+++ b/yocto_training_all_session_decks/session_decks/D4S2_Boot_Flash_Verify.pptx
@@ -5,25 +5,25 @@
     <p:sldMasterId id="2147483648" r:id="rId1"/>
   </p:sldMasterIdLst>
   <p:notesMasterIdLst>
-    <p:notesMasterId r:id="rId8"/>
+    <p:notesMasterId r:id="rId10"/>
   </p:notesMasterIdLst>
   <p:handoutMasterIdLst>
-    <p:handoutMasterId r:id="rId9"/>
+    <p:handoutMasterId r:id="rId11"/>
   </p:handoutMasterIdLst>
   <p:sldIdLst>
-    <p:sldId id="1007" r:id="rId18"/>
-    <p:sldId id="1008" r:id="rId19"/>
-    <p:sldId id="1009" r:id="rId20"/>
-    <p:sldId id="1010" r:id="rId21"/>
-    <p:sldId id="1011" r:id="rId22"/>
-    <p:sldId id="1012" r:id="rId23"/>
-    <p:sldId id="1013" r:id="rId24"/>
-    <p:sldId id="1014" r:id="rId25"/>
+    <p:sldId id="1007" r:id="rId2"/>
+    <p:sldId id="1008" r:id="rId3"/>
+    <p:sldId id="1009" r:id="rId4"/>
+    <p:sldId id="1010" r:id="rId5"/>
+    <p:sldId id="1011" r:id="rId6"/>
+    <p:sldId id="1012" r:id="rId7"/>
+    <p:sldId id="1013" r:id="rId8"/>
+    <p:sldId id="1014" r:id="rId9"/>
   </p:sldIdLst>
   <p:sldSz cx="12192000" cy="6858000"/>
   <p:notesSz cx="6858000" cy="9144000"/>
   <p:custDataLst>
-    <p:tags r:id="rId10"/>
+    <p:tags r:id="rId12"/>
   </p:custDataLst>
   <p:defaultTextStyle>
     <a:defPPr>
@@ -2929,7 +2929,7 @@
           <a:p>
             <a:fld id="{0CEC647C-F50C-4F78-AA33-D7AA6CDA18EE}" type="datetimeFigureOut">
               <a:rPr lang="en-US" smtClean="0"/>
-              <a:t>7/13/2025</a:t>
+              <a:t>6/11/2026</a:t>
             </a:fld>
             <a:endParaRPr lang="en-US"/>
           </a:p>
@@ -3094,7 +3094,7 @@
           <a:p>
             <a:fld id="{3A83341F-E62C-483B-84B4-966F8BE46097}" type="datetimeFigureOut">
               <a:rPr lang="en-US" smtClean="0"/>
-              <a:t>7/13/2025</a:t>
+              <a:t>6/11/2026</a:t>
             </a:fld>
             <a:endParaRPr lang="en-US"/>
           </a:p>
@@ -5178,8 +5178,8 @@
 </p:sldMaster>
 </file>
 
-<file path=ppt/slides/slide10.xml><?xml version="1.0" encoding="utf-8"?>
-<p:sld xmlns:a="http://schemas.openxmlformats.org/drawingml/2006/main" xmlns:p="http://schemas.openxmlformats.org/presentationml/2006/main" xmlns:r="http://schemas.openxmlformats.org/officeDocument/2006/relationships">
+<file path=ppt/slides/slide1.xml><?xml version="1.0" encoding="utf-8"?>
+<p:sld xmlns:a="http://schemas.openxmlformats.org/drawingml/2006/main" xmlns:r="http://schemas.openxmlformats.org/officeDocument/2006/relationships" xmlns:p="http://schemas.openxmlformats.org/presentationml/2006/main">
   <p:cSld>
     <p:spTree>
       <p:nvGrpSpPr>
@@ -5187,7 +5187,102 @@
         <p:cNvGrpSpPr/>
         <p:nvPr/>
       </p:nvGrpSpPr>
-      <p:grpSpPr/>
+      <p:grpSpPr>
+        <a:xfrm>
+          <a:off x="0" y="0"/>
+          <a:ext cx="0" cy="0"/>
+          <a:chOff x="0" y="0"/>
+          <a:chExt cx="0" cy="0"/>
+        </a:xfrm>
+      </p:grpSpPr>
+      <p:sp>
+        <p:nvSpPr>
+          <p:cNvPr id="2" name="Title 1"/>
+          <p:cNvSpPr>
+            <a:spLocks noGrp="1"/>
+          </p:cNvSpPr>
+          <p:nvPr>
+            <p:ph type="ctrTitle"/>
+          </p:nvPr>
+        </p:nvSpPr>
+        <p:spPr/>
+        <p:txBody>
+          <a:bodyPr/>
+          <a:lstStyle/>
+          <a:p>
+            <a:r>
+              <a:rPr sz="4400" b="1">
+                <a:solidFill>
+                  <a:srgbClr val="FFFFFF"/>
+                </a:solidFill>
+                <a:latin typeface="Calibri"/>
+              </a:rPr>
+              <a:t>Boot, Flash, Verify</a:t>
+            </a:r>
+          </a:p>
+        </p:txBody>
+      </p:sp>
+      <p:sp>
+        <p:nvSpPr>
+          <p:cNvPr id="3" name="Subtitle 2"/>
+          <p:cNvSpPr>
+            <a:spLocks noGrp="1"/>
+          </p:cNvSpPr>
+          <p:nvPr>
+            <p:ph type="subTitle" idx="1"/>
+          </p:nvPr>
+        </p:nvSpPr>
+        <p:spPr/>
+        <p:txBody>
+          <a:bodyPr/>
+          <a:lstStyle/>
+          <a:p>
+            <a:r>
+              <a:rPr sz="1800">
+                <a:solidFill>
+                  <a:srgbClr val="FFFFFF"/>
+                </a:solidFill>
+                <a:latin typeface="Calibri"/>
+              </a:rPr>
+              <a:t>From </a:t>
+            </a:r>
+            <a:r>
+              <a:rPr sz="1800" dirty="0">
+                <a:solidFill>
+                  <a:srgbClr val="FFFFFF"/>
+                </a:solidFill>
+                <a:latin typeface="Calibri"/>
+              </a:rPr>
+              <a:t>image artifact to a working device</a:t>
+            </a:r>
+          </a:p>
+        </p:txBody>
+      </p:sp>
+    </p:spTree>
+  </p:cSld>
+  <p:clrMapOvr>
+    <a:masterClrMapping/>
+  </p:clrMapOvr>
+</p:sld>
+</file>
+
+<file path=ppt/slides/slide2.xml><?xml version="1.0" encoding="utf-8"?>
+<p:sld xmlns:a="http://schemas.openxmlformats.org/drawingml/2006/main" xmlns:r="http://schemas.openxmlformats.org/officeDocument/2006/relationships" xmlns:p="http://schemas.openxmlformats.org/presentationml/2006/main">
+  <p:cSld>
+    <p:spTree>
+      <p:nvGrpSpPr>
+        <p:cNvPr id="1" name=""/>
+        <p:cNvGrpSpPr/>
+        <p:nvPr/>
+      </p:nvGrpSpPr>
+      <p:grpSpPr>
+        <a:xfrm>
+          <a:off x="0" y="0"/>
+          <a:ext cx="0" cy="0"/>
+          <a:chOff x="0" y="0"/>
+          <a:chExt cx="0" cy="0"/>
+        </a:xfrm>
+      </p:grpSpPr>
       <p:sp>
         <p:nvSpPr>
           <p:cNvPr id="2" name="Title 1"/>
@@ -5210,7 +5305,162 @@
                 </a:solidFill>
                 <a:latin typeface="Calibri"/>
               </a:rPr>
-              <a:t>Flashing Methods</a:t>
+              <a:t>Session Agenda</a:t>
+            </a:r>
+          </a:p>
+        </p:txBody>
+      </p:sp>
+      <p:sp>
+        <p:nvSpPr>
+          <p:cNvPr id="3" name="TextBox 2"/>
+          <p:cNvSpPr txBox="1"/>
+          <p:nvPr/>
+        </p:nvSpPr>
+        <p:spPr>
+          <a:xfrm>
+            <a:off x="822960" y="1463040"/>
+            <a:ext cx="10515600" cy="5029200"/>
+          </a:xfrm>
+          <a:prstGeom prst="rect">
+            <a:avLst/>
+          </a:prstGeom>
+          <a:noFill/>
+        </p:spPr>
+        <p:txBody>
+          <a:bodyPr wrap="square" lIns="45720" rIns="45720">
+            <a:spAutoFit/>
+          </a:bodyPr>
+          <a:lstStyle/>
+          <a:p>
+            <a:pPr>
+              <a:spcAft>
+                <a:spcPts val="600"/>
+              </a:spcAft>
+            </a:pPr>
+            <a:r>
+              <a:rPr sz="2000" b="0" i="0">
+                <a:solidFill>
+                  <a:srgbClr val="333333"/>
+                </a:solidFill>
+                <a:latin typeface="Calibri"/>
+              </a:rPr>
+              <a:t>1.  Boot flow on a real device</a:t>
+            </a:r>
+          </a:p>
+          <a:p>
+            <a:pPr>
+              <a:spcAft>
+                <a:spcPts val="600"/>
+              </a:spcAft>
+            </a:pPr>
+            <a:r>
+              <a:rPr sz="2000" b="0" i="0">
+                <a:solidFill>
+                  <a:srgbClr val="333333"/>
+                </a:solidFill>
+                <a:latin typeface="Calibri"/>
+              </a:rPr>
+              <a:t>2.  Flashing — wic, sdcard, raw partitions</a:t>
+            </a:r>
+          </a:p>
+          <a:p>
+            <a:pPr>
+              <a:spcAft>
+                <a:spcPts val="600"/>
+              </a:spcAft>
+            </a:pPr>
+            <a:r>
+              <a:rPr sz="2000" b="0" i="0">
+                <a:solidFill>
+                  <a:srgbClr val="333333"/>
+                </a:solidFill>
+                <a:latin typeface="Calibri"/>
+              </a:rPr>
+              <a:t>3.  First-boot checklist</a:t>
+            </a:r>
+          </a:p>
+          <a:p>
+            <a:pPr>
+              <a:spcAft>
+                <a:spcPts val="600"/>
+              </a:spcAft>
+            </a:pPr>
+            <a:r>
+              <a:rPr sz="2000" b="0" i="0">
+                <a:solidFill>
+                  <a:srgbClr val="333333"/>
+                </a:solidFill>
+                <a:latin typeface="Calibri"/>
+              </a:rPr>
+              <a:t>4.  Common bring-up failures</a:t>
+            </a:r>
+          </a:p>
+          <a:p>
+            <a:pPr>
+              <a:spcAft>
+                <a:spcPts val="600"/>
+              </a:spcAft>
+            </a:pPr>
+            <a:r>
+              <a:rPr sz="2000" b="0" i="0">
+                <a:solidFill>
+                  <a:srgbClr val="333333"/>
+                </a:solidFill>
+                <a:latin typeface="Calibri"/>
+              </a:rPr>
+              <a:t>5.  Validating the boot was clean</a:t>
+            </a:r>
+          </a:p>
+        </p:txBody>
+      </p:sp>
+    </p:spTree>
+  </p:cSld>
+  <p:clrMapOvr>
+    <a:masterClrMapping/>
+  </p:clrMapOvr>
+</p:sld>
+</file>
+
+<file path=ppt/slides/slide3.xml><?xml version="1.0" encoding="utf-8"?>
+<p:sld xmlns:a="http://schemas.openxmlformats.org/drawingml/2006/main" xmlns:r="http://schemas.openxmlformats.org/officeDocument/2006/relationships" xmlns:p="http://schemas.openxmlformats.org/presentationml/2006/main">
+  <p:cSld>
+    <p:spTree>
+      <p:nvGrpSpPr>
+        <p:cNvPr id="1" name=""/>
+        <p:cNvGrpSpPr/>
+        <p:nvPr/>
+      </p:nvGrpSpPr>
+      <p:grpSpPr>
+        <a:xfrm>
+          <a:off x="0" y="0"/>
+          <a:ext cx="0" cy="0"/>
+          <a:chOff x="0" y="0"/>
+          <a:chExt cx="0" cy="0"/>
+        </a:xfrm>
+      </p:grpSpPr>
+      <p:sp>
+        <p:nvSpPr>
+          <p:cNvPr id="2" name="Title 1"/>
+          <p:cNvSpPr>
+            <a:spLocks noGrp="1"/>
+          </p:cNvSpPr>
+          <p:nvPr>
+            <p:ph type="title"/>
+          </p:nvPr>
+        </p:nvSpPr>
+        <p:spPr/>
+        <p:txBody>
+          <a:bodyPr/>
+          <a:lstStyle/>
+          <a:p>
+            <a:r>
+              <a:rPr sz="3200" b="1">
+                <a:solidFill>
+                  <a:srgbClr val="CC0066"/>
+                </a:solidFill>
+                <a:latin typeface="Calibri"/>
+              </a:rPr>
+              <a:t>Boot Flow on a Real Device</a:t>
             </a:r>
           </a:p>
         </p:txBody>
@@ -5232,7 +5482,949 @@
           <a:noFill/>
         </p:spPr>
         <p:txBody>
-          <a:bodyPr wrap="square" anchor="t" lIns="45720" rIns="45720">
+          <a:bodyPr wrap="square" lIns="45720" rIns="45720" anchor="t">
+            <a:spAutoFit/>
+          </a:bodyPr>
+          <a:lstStyle/>
+          <a:p>
+            <a:pPr algn="l"/>
+            <a:r>
+              <a:rPr sz="1500" b="0" i="1">
+                <a:solidFill>
+                  <a:srgbClr val="666666"/>
+                </a:solidFill>
+                <a:latin typeface="Calibri"/>
+              </a:rPr>
+              <a:t>What happens between power and login.</a:t>
+            </a:r>
+          </a:p>
+        </p:txBody>
+      </p:sp>
+      <p:sp>
+        <p:nvSpPr>
+          <p:cNvPr id="4" name="Rounded Rectangle 3"/>
+          <p:cNvSpPr/>
+          <p:nvPr/>
+        </p:nvSpPr>
+        <p:spPr>
+          <a:xfrm>
+            <a:off x="379476" y="2103120"/>
+            <a:ext cx="1388745" cy="640080"/>
+          </a:xfrm>
+          <a:prstGeom prst="roundRect">
+            <a:avLst/>
+          </a:prstGeom>
+          <a:solidFill>
+            <a:srgbClr val="FCE4EC"/>
+          </a:solidFill>
+          <a:ln w="6350">
+            <a:solidFill>
+              <a:srgbClr val="CC0066"/>
+            </a:solidFill>
+          </a:ln>
+          <a:effectLst/>
+        </p:spPr>
+        <p:style>
+          <a:lnRef idx="1">
+            <a:schemeClr val="accent1"/>
+          </a:lnRef>
+          <a:fillRef idx="3">
+            <a:schemeClr val="accent1"/>
+          </a:fillRef>
+          <a:effectRef idx="2">
+            <a:schemeClr val="accent1"/>
+          </a:effectRef>
+          <a:fontRef idx="minor">
+            <a:schemeClr val="lt1"/>
+          </a:fontRef>
+        </p:style>
+        <p:txBody>
+          <a:bodyPr lIns="18288" rIns="18288" rtlCol="0" anchor="ctr"/>
+          <a:lstStyle/>
+          <a:p>
+            <a:pPr algn="ctr"/>
+            <a:r>
+              <a:rPr sz="1100" b="1">
+                <a:solidFill>
+                  <a:srgbClr val="663399"/>
+                </a:solidFill>
+                <a:latin typeface="Consolas"/>
+              </a:rPr>
+              <a:t>Power</a:t>
+            </a:r>
+          </a:p>
+        </p:txBody>
+      </p:sp>
+      <p:sp>
+        <p:nvSpPr>
+          <p:cNvPr id="5" name="TextBox 4"/>
+          <p:cNvSpPr txBox="1"/>
+          <p:nvPr/>
+        </p:nvSpPr>
+        <p:spPr>
+          <a:xfrm>
+            <a:off x="379476" y="2788920"/>
+            <a:ext cx="1388745" cy="320040"/>
+          </a:xfrm>
+          <a:prstGeom prst="rect">
+            <a:avLst/>
+          </a:prstGeom>
+          <a:noFill/>
+        </p:spPr>
+        <p:txBody>
+          <a:bodyPr wrap="square" lIns="45720" rIns="45720" anchor="t">
+            <a:spAutoFit/>
+          </a:bodyPr>
+          <a:lstStyle/>
+          <a:p>
+            <a:pPr algn="ctr"/>
+            <a:r>
+              <a:rPr sz="900" b="0" i="0">
+                <a:solidFill>
+                  <a:srgbClr val="666666"/>
+                </a:solidFill>
+                <a:latin typeface="Calibri"/>
+              </a:rPr>
+              <a:t>Reset</a:t>
+            </a:r>
+          </a:p>
+        </p:txBody>
+      </p:sp>
+      <p:sp>
+        <p:nvSpPr>
+          <p:cNvPr id="6" name="Rounded Rectangle 5"/>
+          <p:cNvSpPr/>
+          <p:nvPr/>
+        </p:nvSpPr>
+        <p:spPr>
+          <a:xfrm>
+            <a:off x="1813941" y="2103120"/>
+            <a:ext cx="1388745" cy="640080"/>
+          </a:xfrm>
+          <a:prstGeom prst="roundRect">
+            <a:avLst/>
+          </a:prstGeom>
+          <a:solidFill>
+            <a:srgbClr val="FCE4EC"/>
+          </a:solidFill>
+          <a:ln w="6350">
+            <a:solidFill>
+              <a:srgbClr val="CC0066"/>
+            </a:solidFill>
+          </a:ln>
+          <a:effectLst/>
+        </p:spPr>
+        <p:style>
+          <a:lnRef idx="1">
+            <a:schemeClr val="accent1"/>
+          </a:lnRef>
+          <a:fillRef idx="3">
+            <a:schemeClr val="accent1"/>
+          </a:fillRef>
+          <a:effectRef idx="2">
+            <a:schemeClr val="accent1"/>
+          </a:effectRef>
+          <a:fontRef idx="minor">
+            <a:schemeClr val="lt1"/>
+          </a:fontRef>
+        </p:style>
+        <p:txBody>
+          <a:bodyPr lIns="18288" rIns="18288" rtlCol="0" anchor="ctr"/>
+          <a:lstStyle/>
+          <a:p>
+            <a:pPr algn="ctr"/>
+            <a:r>
+              <a:rPr sz="1100" b="1">
+                <a:solidFill>
+                  <a:srgbClr val="663399"/>
+                </a:solidFill>
+                <a:latin typeface="Consolas"/>
+              </a:rPr>
+              <a:t>ROM</a:t>
+            </a:r>
+          </a:p>
+        </p:txBody>
+      </p:sp>
+      <p:sp>
+        <p:nvSpPr>
+          <p:cNvPr id="7" name="TextBox 6"/>
+          <p:cNvSpPr txBox="1"/>
+          <p:nvPr/>
+        </p:nvSpPr>
+        <p:spPr>
+          <a:xfrm>
+            <a:off x="1813941" y="2788920"/>
+            <a:ext cx="1388745" cy="320040"/>
+          </a:xfrm>
+          <a:prstGeom prst="rect">
+            <a:avLst/>
+          </a:prstGeom>
+          <a:noFill/>
+        </p:spPr>
+        <p:txBody>
+          <a:bodyPr wrap="square" lIns="45720" rIns="45720" anchor="t">
+            <a:spAutoFit/>
+          </a:bodyPr>
+          <a:lstStyle/>
+          <a:p>
+            <a:pPr algn="ctr"/>
+            <a:r>
+              <a:rPr sz="900" b="0" i="0">
+                <a:solidFill>
+                  <a:srgbClr val="666666"/>
+                </a:solidFill>
+                <a:latin typeface="Calibri"/>
+              </a:rPr>
+              <a:t>Vendor</a:t>
+            </a:r>
+          </a:p>
+        </p:txBody>
+      </p:sp>
+      <p:sp>
+        <p:nvSpPr>
+          <p:cNvPr id="8" name="Rounded Rectangle 7"/>
+          <p:cNvSpPr/>
+          <p:nvPr/>
+        </p:nvSpPr>
+        <p:spPr>
+          <a:xfrm>
+            <a:off x="3248406" y="2103120"/>
+            <a:ext cx="1388745" cy="640080"/>
+          </a:xfrm>
+          <a:prstGeom prst="roundRect">
+            <a:avLst/>
+          </a:prstGeom>
+          <a:solidFill>
+            <a:srgbClr val="FCE4EC"/>
+          </a:solidFill>
+          <a:ln w="6350">
+            <a:solidFill>
+              <a:srgbClr val="CC0066"/>
+            </a:solidFill>
+          </a:ln>
+          <a:effectLst/>
+        </p:spPr>
+        <p:style>
+          <a:lnRef idx="1">
+            <a:schemeClr val="accent1"/>
+          </a:lnRef>
+          <a:fillRef idx="3">
+            <a:schemeClr val="accent1"/>
+          </a:fillRef>
+          <a:effectRef idx="2">
+            <a:schemeClr val="accent1"/>
+          </a:effectRef>
+          <a:fontRef idx="minor">
+            <a:schemeClr val="lt1"/>
+          </a:fontRef>
+        </p:style>
+        <p:txBody>
+          <a:bodyPr lIns="18288" rIns="18288" rtlCol="0" anchor="ctr"/>
+          <a:lstStyle/>
+          <a:p>
+            <a:pPr algn="ctr"/>
+            <a:r>
+              <a:rPr sz="1100" b="1">
+                <a:solidFill>
+                  <a:srgbClr val="663399"/>
+                </a:solidFill>
+                <a:latin typeface="Consolas"/>
+              </a:rPr>
+              <a:t>SPL</a:t>
+            </a:r>
+          </a:p>
+        </p:txBody>
+      </p:sp>
+      <p:sp>
+        <p:nvSpPr>
+          <p:cNvPr id="9" name="TextBox 8"/>
+          <p:cNvSpPr txBox="1"/>
+          <p:nvPr/>
+        </p:nvSpPr>
+        <p:spPr>
+          <a:xfrm>
+            <a:off x="3248406" y="2788920"/>
+            <a:ext cx="1388745" cy="320040"/>
+          </a:xfrm>
+          <a:prstGeom prst="rect">
+            <a:avLst/>
+          </a:prstGeom>
+          <a:noFill/>
+        </p:spPr>
+        <p:txBody>
+          <a:bodyPr wrap="square" lIns="45720" rIns="45720" anchor="t">
+            <a:spAutoFit/>
+          </a:bodyPr>
+          <a:lstStyle/>
+          <a:p>
+            <a:pPr algn="ctr"/>
+            <a:r>
+              <a:rPr sz="900" b="0" i="0">
+                <a:solidFill>
+                  <a:srgbClr val="666666"/>
+                </a:solidFill>
+                <a:latin typeface="Calibri"/>
+              </a:rPr>
+              <a:t>Stage 1</a:t>
+            </a:r>
+          </a:p>
+        </p:txBody>
+      </p:sp>
+      <p:sp>
+        <p:nvSpPr>
+          <p:cNvPr id="10" name="Rounded Rectangle 9"/>
+          <p:cNvSpPr/>
+          <p:nvPr/>
+        </p:nvSpPr>
+        <p:spPr>
+          <a:xfrm>
+            <a:off x="4682871" y="2103120"/>
+            <a:ext cx="1388745" cy="640080"/>
+          </a:xfrm>
+          <a:prstGeom prst="roundRect">
+            <a:avLst/>
+          </a:prstGeom>
+          <a:solidFill>
+            <a:srgbClr val="FCE4EC"/>
+          </a:solidFill>
+          <a:ln w="6350">
+            <a:solidFill>
+              <a:srgbClr val="CC0066"/>
+            </a:solidFill>
+          </a:ln>
+          <a:effectLst/>
+        </p:spPr>
+        <p:style>
+          <a:lnRef idx="1">
+            <a:schemeClr val="accent1"/>
+          </a:lnRef>
+          <a:fillRef idx="3">
+            <a:schemeClr val="accent1"/>
+          </a:fillRef>
+          <a:effectRef idx="2">
+            <a:schemeClr val="accent1"/>
+          </a:effectRef>
+          <a:fontRef idx="minor">
+            <a:schemeClr val="lt1"/>
+          </a:fontRef>
+        </p:style>
+        <p:txBody>
+          <a:bodyPr lIns="18288" rIns="18288" rtlCol="0" anchor="ctr"/>
+          <a:lstStyle/>
+          <a:p>
+            <a:pPr algn="ctr"/>
+            <a:r>
+              <a:rPr sz="1100" b="1">
+                <a:solidFill>
+                  <a:srgbClr val="663399"/>
+                </a:solidFill>
+                <a:latin typeface="Consolas"/>
+              </a:rPr>
+              <a:t>U-Boot</a:t>
+            </a:r>
+          </a:p>
+        </p:txBody>
+      </p:sp>
+      <p:sp>
+        <p:nvSpPr>
+          <p:cNvPr id="11" name="TextBox 10"/>
+          <p:cNvSpPr txBox="1"/>
+          <p:nvPr/>
+        </p:nvSpPr>
+        <p:spPr>
+          <a:xfrm>
+            <a:off x="4682871" y="2788920"/>
+            <a:ext cx="1388745" cy="320040"/>
+          </a:xfrm>
+          <a:prstGeom prst="rect">
+            <a:avLst/>
+          </a:prstGeom>
+          <a:noFill/>
+        </p:spPr>
+        <p:txBody>
+          <a:bodyPr wrap="square" lIns="45720" rIns="45720" anchor="t">
+            <a:spAutoFit/>
+          </a:bodyPr>
+          <a:lstStyle/>
+          <a:p>
+            <a:pPr algn="ctr"/>
+            <a:r>
+              <a:rPr sz="900" b="0" i="0">
+                <a:solidFill>
+                  <a:srgbClr val="666666"/>
+                </a:solidFill>
+                <a:latin typeface="Calibri"/>
+              </a:rPr>
+              <a:t>Stage 2</a:t>
+            </a:r>
+          </a:p>
+        </p:txBody>
+      </p:sp>
+      <p:sp>
+        <p:nvSpPr>
+          <p:cNvPr id="12" name="Rounded Rectangle 11"/>
+          <p:cNvSpPr/>
+          <p:nvPr/>
+        </p:nvSpPr>
+        <p:spPr>
+          <a:xfrm>
+            <a:off x="6117336" y="2103120"/>
+            <a:ext cx="1388745" cy="640080"/>
+          </a:xfrm>
+          <a:prstGeom prst="roundRect">
+            <a:avLst/>
+          </a:prstGeom>
+          <a:solidFill>
+            <a:srgbClr val="E9D8F0"/>
+          </a:solidFill>
+          <a:ln w="6350">
+            <a:solidFill>
+              <a:srgbClr val="CC0066"/>
+            </a:solidFill>
+          </a:ln>
+          <a:effectLst/>
+        </p:spPr>
+        <p:style>
+          <a:lnRef idx="1">
+            <a:schemeClr val="accent1"/>
+          </a:lnRef>
+          <a:fillRef idx="3">
+            <a:schemeClr val="accent1"/>
+          </a:fillRef>
+          <a:effectRef idx="2">
+            <a:schemeClr val="accent1"/>
+          </a:effectRef>
+          <a:fontRef idx="minor">
+            <a:schemeClr val="lt1"/>
+          </a:fontRef>
+        </p:style>
+        <p:txBody>
+          <a:bodyPr lIns="18288" rIns="18288" rtlCol="0" anchor="ctr"/>
+          <a:lstStyle/>
+          <a:p>
+            <a:pPr algn="ctr"/>
+            <a:r>
+              <a:rPr sz="1100" b="1">
+                <a:solidFill>
+                  <a:srgbClr val="663399"/>
+                </a:solidFill>
+                <a:latin typeface="Consolas"/>
+              </a:rPr>
+              <a:t>Kernel</a:t>
+            </a:r>
+          </a:p>
+        </p:txBody>
+      </p:sp>
+      <p:sp>
+        <p:nvSpPr>
+          <p:cNvPr id="13" name="TextBox 12"/>
+          <p:cNvSpPr txBox="1"/>
+          <p:nvPr/>
+        </p:nvSpPr>
+        <p:spPr>
+          <a:xfrm>
+            <a:off x="6117336" y="2788920"/>
+            <a:ext cx="1388745" cy="320040"/>
+          </a:xfrm>
+          <a:prstGeom prst="rect">
+            <a:avLst/>
+          </a:prstGeom>
+          <a:noFill/>
+        </p:spPr>
+        <p:txBody>
+          <a:bodyPr wrap="square" lIns="45720" rIns="45720" anchor="t">
+            <a:spAutoFit/>
+          </a:bodyPr>
+          <a:lstStyle/>
+          <a:p>
+            <a:pPr algn="ctr"/>
+            <a:r>
+              <a:rPr sz="900" b="0" i="0">
+                <a:solidFill>
+                  <a:srgbClr val="666666"/>
+                </a:solidFill>
+                <a:latin typeface="Calibri"/>
+              </a:rPr>
+              <a:t>Init HW</a:t>
+            </a:r>
+          </a:p>
+        </p:txBody>
+      </p:sp>
+      <p:sp>
+        <p:nvSpPr>
+          <p:cNvPr id="14" name="Rounded Rectangle 13"/>
+          <p:cNvSpPr/>
+          <p:nvPr/>
+        </p:nvSpPr>
+        <p:spPr>
+          <a:xfrm>
+            <a:off x="7551800" y="2103120"/>
+            <a:ext cx="1388745" cy="640080"/>
+          </a:xfrm>
+          <a:prstGeom prst="roundRect">
+            <a:avLst/>
+          </a:prstGeom>
+          <a:solidFill>
+            <a:srgbClr val="E9D8F0"/>
+          </a:solidFill>
+          <a:ln w="6350">
+            <a:solidFill>
+              <a:srgbClr val="CC0066"/>
+            </a:solidFill>
+          </a:ln>
+          <a:effectLst/>
+        </p:spPr>
+        <p:style>
+          <a:lnRef idx="1">
+            <a:schemeClr val="accent1"/>
+          </a:lnRef>
+          <a:fillRef idx="3">
+            <a:schemeClr val="accent1"/>
+          </a:fillRef>
+          <a:effectRef idx="2">
+            <a:schemeClr val="accent1"/>
+          </a:effectRef>
+          <a:fontRef idx="minor">
+            <a:schemeClr val="lt1"/>
+          </a:fontRef>
+        </p:style>
+        <p:txBody>
+          <a:bodyPr lIns="18288" rIns="18288" rtlCol="0" anchor="ctr"/>
+          <a:lstStyle/>
+          <a:p>
+            <a:pPr algn="ctr"/>
+            <a:r>
+              <a:rPr sz="1100" b="1">
+                <a:solidFill>
+                  <a:srgbClr val="663399"/>
+                </a:solidFill>
+                <a:latin typeface="Consolas"/>
+              </a:rPr>
+              <a:t>initramfs</a:t>
+            </a:r>
+          </a:p>
+        </p:txBody>
+      </p:sp>
+      <p:sp>
+        <p:nvSpPr>
+          <p:cNvPr id="15" name="TextBox 14"/>
+          <p:cNvSpPr txBox="1"/>
+          <p:nvPr/>
+        </p:nvSpPr>
+        <p:spPr>
+          <a:xfrm>
+            <a:off x="7551800" y="2788920"/>
+            <a:ext cx="1388745" cy="320040"/>
+          </a:xfrm>
+          <a:prstGeom prst="rect">
+            <a:avLst/>
+          </a:prstGeom>
+          <a:noFill/>
+        </p:spPr>
+        <p:txBody>
+          <a:bodyPr wrap="square" lIns="45720" rIns="45720" anchor="t">
+            <a:spAutoFit/>
+          </a:bodyPr>
+          <a:lstStyle/>
+          <a:p>
+            <a:pPr algn="ctr"/>
+            <a:r>
+              <a:rPr sz="900" b="0" i="0">
+                <a:solidFill>
+                  <a:srgbClr val="666666"/>
+                </a:solidFill>
+                <a:latin typeface="Calibri"/>
+              </a:rPr>
+              <a:t>Mount /</a:t>
+            </a:r>
+          </a:p>
+        </p:txBody>
+      </p:sp>
+      <p:sp>
+        <p:nvSpPr>
+          <p:cNvPr id="16" name="Rounded Rectangle 15"/>
+          <p:cNvSpPr/>
+          <p:nvPr/>
+        </p:nvSpPr>
+        <p:spPr>
+          <a:xfrm>
+            <a:off x="8986266" y="2103120"/>
+            <a:ext cx="1388745" cy="640080"/>
+          </a:xfrm>
+          <a:prstGeom prst="roundRect">
+            <a:avLst/>
+          </a:prstGeom>
+          <a:solidFill>
+            <a:srgbClr val="E9D8F0"/>
+          </a:solidFill>
+          <a:ln w="6350">
+            <a:solidFill>
+              <a:srgbClr val="CC0066"/>
+            </a:solidFill>
+          </a:ln>
+          <a:effectLst/>
+        </p:spPr>
+        <p:style>
+          <a:lnRef idx="1">
+            <a:schemeClr val="accent1"/>
+          </a:lnRef>
+          <a:fillRef idx="3">
+            <a:schemeClr val="accent1"/>
+          </a:fillRef>
+          <a:effectRef idx="2">
+            <a:schemeClr val="accent1"/>
+          </a:effectRef>
+          <a:fontRef idx="minor">
+            <a:schemeClr val="lt1"/>
+          </a:fontRef>
+        </p:style>
+        <p:txBody>
+          <a:bodyPr lIns="18288" rIns="18288" rtlCol="0" anchor="ctr"/>
+          <a:lstStyle/>
+          <a:p>
+            <a:pPr algn="ctr"/>
+            <a:r>
+              <a:rPr sz="1100" b="1">
+                <a:solidFill>
+                  <a:srgbClr val="663399"/>
+                </a:solidFill>
+                <a:latin typeface="Consolas"/>
+              </a:rPr>
+              <a:t>systemd</a:t>
+            </a:r>
+          </a:p>
+        </p:txBody>
+      </p:sp>
+      <p:sp>
+        <p:nvSpPr>
+          <p:cNvPr id="17" name="TextBox 16"/>
+          <p:cNvSpPr txBox="1"/>
+          <p:nvPr/>
+        </p:nvSpPr>
+        <p:spPr>
+          <a:xfrm>
+            <a:off x="8986266" y="2788920"/>
+            <a:ext cx="1388745" cy="320040"/>
+          </a:xfrm>
+          <a:prstGeom prst="rect">
+            <a:avLst/>
+          </a:prstGeom>
+          <a:noFill/>
+        </p:spPr>
+        <p:txBody>
+          <a:bodyPr wrap="square" lIns="45720" rIns="45720" anchor="t">
+            <a:spAutoFit/>
+          </a:bodyPr>
+          <a:lstStyle/>
+          <a:p>
+            <a:pPr algn="ctr"/>
+            <a:r>
+              <a:rPr sz="900" b="0" i="0">
+                <a:solidFill>
+                  <a:srgbClr val="666666"/>
+                </a:solidFill>
+                <a:latin typeface="Calibri"/>
+              </a:rPr>
+              <a:t>Services</a:t>
+            </a:r>
+          </a:p>
+        </p:txBody>
+      </p:sp>
+      <p:sp>
+        <p:nvSpPr>
+          <p:cNvPr id="18" name="Rounded Rectangle 17"/>
+          <p:cNvSpPr/>
+          <p:nvPr/>
+        </p:nvSpPr>
+        <p:spPr>
+          <a:xfrm>
+            <a:off x="10420731" y="2103120"/>
+            <a:ext cx="1388745" cy="640080"/>
+          </a:xfrm>
+          <a:prstGeom prst="roundRect">
+            <a:avLst/>
+          </a:prstGeom>
+          <a:solidFill>
+            <a:srgbClr val="E9D8F0"/>
+          </a:solidFill>
+          <a:ln w="6350">
+            <a:solidFill>
+              <a:srgbClr val="CC0066"/>
+            </a:solidFill>
+          </a:ln>
+          <a:effectLst/>
+        </p:spPr>
+        <p:style>
+          <a:lnRef idx="1">
+            <a:schemeClr val="accent1"/>
+          </a:lnRef>
+          <a:fillRef idx="3">
+            <a:schemeClr val="accent1"/>
+          </a:fillRef>
+          <a:effectRef idx="2">
+            <a:schemeClr val="accent1"/>
+          </a:effectRef>
+          <a:fontRef idx="minor">
+            <a:schemeClr val="lt1"/>
+          </a:fontRef>
+        </p:style>
+        <p:txBody>
+          <a:bodyPr lIns="18288" rIns="18288" rtlCol="0" anchor="ctr"/>
+          <a:lstStyle/>
+          <a:p>
+            <a:pPr algn="ctr"/>
+            <a:r>
+              <a:rPr sz="1100" b="1">
+                <a:solidFill>
+                  <a:srgbClr val="663399"/>
+                </a:solidFill>
+                <a:latin typeface="Consolas"/>
+              </a:rPr>
+              <a:t>login</a:t>
+            </a:r>
+          </a:p>
+        </p:txBody>
+      </p:sp>
+      <p:sp>
+        <p:nvSpPr>
+          <p:cNvPr id="19" name="TextBox 18"/>
+          <p:cNvSpPr txBox="1"/>
+          <p:nvPr/>
+        </p:nvSpPr>
+        <p:spPr>
+          <a:xfrm>
+            <a:off x="10420731" y="2788920"/>
+            <a:ext cx="1388745" cy="320040"/>
+          </a:xfrm>
+          <a:prstGeom prst="rect">
+            <a:avLst/>
+          </a:prstGeom>
+          <a:noFill/>
+        </p:spPr>
+        <p:txBody>
+          <a:bodyPr wrap="square" lIns="45720" rIns="45720" anchor="t">
+            <a:spAutoFit/>
+          </a:bodyPr>
+          <a:lstStyle/>
+          <a:p>
+            <a:pPr algn="ctr"/>
+            <a:r>
+              <a:rPr sz="900" b="0" i="0">
+                <a:solidFill>
+                  <a:srgbClr val="666666"/>
+                </a:solidFill>
+                <a:latin typeface="Calibri"/>
+              </a:rPr>
+              <a:t>Ready</a:t>
+            </a:r>
+          </a:p>
+        </p:txBody>
+      </p:sp>
+      <p:sp>
+        <p:nvSpPr>
+          <p:cNvPr id="20" name="TextBox 19"/>
+          <p:cNvSpPr txBox="1"/>
+          <p:nvPr/>
+        </p:nvSpPr>
+        <p:spPr>
+          <a:xfrm>
+            <a:off x="822960" y="3657600"/>
+            <a:ext cx="10515600" cy="2377440"/>
+          </a:xfrm>
+          <a:prstGeom prst="rect">
+            <a:avLst/>
+          </a:prstGeom>
+          <a:noFill/>
+        </p:spPr>
+        <p:txBody>
+          <a:bodyPr wrap="square" lIns="45720" rIns="45720">
+            <a:spAutoFit/>
+          </a:bodyPr>
+          <a:lstStyle/>
+          <a:p>
+            <a:pPr>
+              <a:spcAft>
+                <a:spcPts val="600"/>
+              </a:spcAft>
+            </a:pPr>
+            <a:r>
+              <a:rPr sz="1500" b="1" i="0">
+                <a:solidFill>
+                  <a:srgbClr val="CC0066"/>
+                </a:solidFill>
+                <a:latin typeface="Calibri"/>
+              </a:rPr>
+              <a:t>Stages to remember</a:t>
+            </a:r>
+          </a:p>
+          <a:p>
+            <a:pPr>
+              <a:spcAft>
+                <a:spcPts val="400"/>
+              </a:spcAft>
+            </a:pPr>
+            <a:r>
+              <a:rPr sz="1200" b="0" i="0">
+                <a:solidFill>
+                  <a:srgbClr val="333333"/>
+                </a:solidFill>
+                <a:latin typeface="Calibri"/>
+              </a:rPr>
+              <a:t>• Vendor ROM (BootROM): vendor's first-stage; usually unmodifiable</a:t>
+            </a:r>
+          </a:p>
+          <a:p>
+            <a:pPr>
+              <a:spcAft>
+                <a:spcPts val="400"/>
+              </a:spcAft>
+            </a:pPr>
+            <a:r>
+              <a:rPr sz="1200" b="0" i="0">
+                <a:solidFill>
+                  <a:srgbClr val="333333"/>
+                </a:solidFill>
+                <a:latin typeface="Calibri"/>
+              </a:rPr>
+              <a:t>• SPL: minimal loader that brings up DRAM and loads U-Boot</a:t>
+            </a:r>
+          </a:p>
+          <a:p>
+            <a:pPr>
+              <a:spcAft>
+                <a:spcPts val="400"/>
+              </a:spcAft>
+            </a:pPr>
+            <a:r>
+              <a:rPr sz="1200" b="0" i="0">
+                <a:solidFill>
+                  <a:srgbClr val="333333"/>
+                </a:solidFill>
+                <a:latin typeface="Calibri"/>
+              </a:rPr>
+              <a:t>• U-Boot: loads kernel + DTB + initramfs; passes bootargs</a:t>
+            </a:r>
+          </a:p>
+          <a:p>
+            <a:pPr>
+              <a:spcAft>
+                <a:spcPts val="400"/>
+              </a:spcAft>
+            </a:pPr>
+            <a:r>
+              <a:rPr sz="1200" b="0" i="0">
+                <a:solidFill>
+                  <a:srgbClr val="333333"/>
+                </a:solidFill>
+                <a:latin typeface="Calibri"/>
+              </a:rPr>
+              <a:t>• Kernel: initializes hardware, mounts root filesystem</a:t>
+            </a:r>
+          </a:p>
+          <a:p>
+            <a:pPr>
+              <a:spcAft>
+                <a:spcPts val="800"/>
+              </a:spcAft>
+            </a:pPr>
+            <a:r>
+              <a:rPr sz="1200" b="0" i="0">
+                <a:solidFill>
+                  <a:srgbClr val="333333"/>
+                </a:solidFill>
+                <a:latin typeface="Calibri"/>
+              </a:rPr>
+              <a:t>• systemd: starts services per unit dependencies</a:t>
+            </a:r>
+          </a:p>
+          <a:p>
+            <a:pPr>
+              <a:spcAft>
+                <a:spcPts val="400"/>
+              </a:spcAft>
+            </a:pPr>
+            <a:r>
+              <a:rPr sz="1300" b="1" i="0">
+                <a:solidFill>
+                  <a:srgbClr val="663399"/>
+                </a:solidFill>
+                <a:latin typeface="Calibri"/>
+              </a:rPr>
+              <a:t>If boot fails, identify which stage. The fix lives in that stage.</a:t>
+            </a:r>
+          </a:p>
+        </p:txBody>
+      </p:sp>
+    </p:spTree>
+  </p:cSld>
+  <p:clrMapOvr>
+    <a:masterClrMapping/>
+  </p:clrMapOvr>
+</p:sld>
+</file>
+
+<file path=ppt/slides/slide4.xml><?xml version="1.0" encoding="utf-8"?>
+<p:sld xmlns:a="http://schemas.openxmlformats.org/drawingml/2006/main" xmlns:r="http://schemas.openxmlformats.org/officeDocument/2006/relationships" xmlns:p="http://schemas.openxmlformats.org/presentationml/2006/main">
+  <p:cSld>
+    <p:spTree>
+      <p:nvGrpSpPr>
+        <p:cNvPr id="1" name=""/>
+        <p:cNvGrpSpPr/>
+        <p:nvPr/>
+      </p:nvGrpSpPr>
+      <p:grpSpPr>
+        <a:xfrm>
+          <a:off x="0" y="0"/>
+          <a:ext cx="0" cy="0"/>
+          <a:chOff x="0" y="0"/>
+          <a:chExt cx="0" cy="0"/>
+        </a:xfrm>
+      </p:grpSpPr>
+      <p:sp>
+        <p:nvSpPr>
+          <p:cNvPr id="2" name="Title 1"/>
+          <p:cNvSpPr>
+            <a:spLocks noGrp="1"/>
+          </p:cNvSpPr>
+          <p:nvPr>
+            <p:ph type="title"/>
+          </p:nvPr>
+        </p:nvSpPr>
+        <p:spPr/>
+        <p:txBody>
+          <a:bodyPr/>
+          <a:lstStyle/>
+          <a:p>
+            <a:r>
+              <a:rPr sz="3200" b="1">
+                <a:solidFill>
+                  <a:srgbClr val="CC0066"/>
+                </a:solidFill>
+                <a:latin typeface="Calibri"/>
+              </a:rPr>
+              <a:t>Flashing Methods</a:t>
+            </a:r>
+          </a:p>
+        </p:txBody>
+      </p:sp>
+      <p:sp>
+        <p:nvSpPr>
+          <p:cNvPr id="3" name="TextBox 2"/>
+          <p:cNvSpPr txBox="1"/>
+          <p:nvPr/>
+        </p:nvSpPr>
+        <p:spPr>
+          <a:xfrm>
+            <a:off x="822960" y="1417320"/>
+            <a:ext cx="10515600" cy="365760"/>
+          </a:xfrm>
+          <a:prstGeom prst="rect">
+            <a:avLst/>
+          </a:prstGeom>
+          <a:noFill/>
+        </p:spPr>
+        <p:txBody>
+          <a:bodyPr wrap="square" lIns="45720" rIns="45720" anchor="t">
             <a:spAutoFit/>
           </a:bodyPr>
           <a:lstStyle/>
@@ -5287,7 +6479,7 @@
           </a:fontRef>
         </p:style>
         <p:txBody>
-          <a:bodyPr rtlCol="0" anchor="ctr" lIns="182880"/>
+          <a:bodyPr lIns="182880" rtlCol="0" anchor="ctr"/>
           <a:lstStyle/>
           <a:p>
             <a:pPr algn="ctr"/>
@@ -5357,6 +6549,7 @@
           <a:lstStyle/>
           <a:p>
             <a:pPr algn="ctr"/>
+            <a:endParaRPr/>
           </a:p>
         </p:txBody>
       </p:sp>
@@ -5435,6 +6628,19 @@
                 <a:spcPts val="400"/>
               </a:spcAft>
             </a:pPr>
+            <a:endParaRPr sz="1100" b="0" i="0">
+              <a:solidFill>
+                <a:srgbClr val="333333"/>
+              </a:solidFill>
+              <a:latin typeface="Calibri"/>
+            </a:endParaRPr>
+          </a:p>
+          <a:p>
+            <a:pPr>
+              <a:spcAft>
+                <a:spcPts val="400"/>
+              </a:spcAft>
+            </a:pPr>
             <a:r>
               <a:rPr sz="1100" b="0" i="0">
                 <a:solidFill>
@@ -5442,7 +6648,7 @@
                 </a:solidFill>
                 <a:latin typeface="Calibri"/>
               </a:rPr>
-              <a:t/>
+              <a:t>Skips unallocated blocks</a:t>
             </a:r>
           </a:p>
           <a:p>
@@ -5451,6 +6657,35 @@
                 <a:spcPts val="400"/>
               </a:spcAft>
             </a:pPr>
+            <a:endParaRPr sz="1100" b="0" i="0">
+              <a:solidFill>
+                <a:srgbClr val="333333"/>
+              </a:solidFill>
+              <a:latin typeface="Calibri"/>
+            </a:endParaRPr>
+          </a:p>
+          <a:p>
+            <a:pPr>
+              <a:spcAft>
+                <a:spcPts val="400"/>
+              </a:spcAft>
+            </a:pPr>
+            <a:r>
+              <a:rPr sz="1200" b="1" i="0">
+                <a:solidFill>
+                  <a:srgbClr val="CC0066"/>
+                </a:solidFill>
+                <a:latin typeface="Calibri"/>
+              </a:rPr>
+              <a:t>Command:</a:t>
+            </a:r>
+          </a:p>
+          <a:p>
+            <a:pPr>
+              <a:spcAft>
+                <a:spcPts val="400"/>
+              </a:spcAft>
+            </a:pPr>
             <a:r>
               <a:rPr sz="1100" b="0" i="0">
                 <a:solidFill>
@@ -5458,7 +6693,7 @@
                 </a:solidFill>
                 <a:latin typeface="Calibri"/>
               </a:rPr>
-              <a:t>Skips unallocated blocks</a:t>
+              <a:t>bmaptool copy \</a:t>
             </a:r>
           </a:p>
           <a:p>
@@ -5474,7 +6709,7 @@
                 </a:solidFill>
                 <a:latin typeface="Calibri"/>
               </a:rPr>
-              <a:t/>
+              <a:t>  image.wic.bz2 /dev/sdX</a:t>
             </a:r>
           </a:p>
           <a:p>
@@ -5483,63 +6718,12 @@
                 <a:spcPts val="400"/>
               </a:spcAft>
             </a:pPr>
-            <a:r>
-              <a:rPr sz="1200" b="1" i="0">
-                <a:solidFill>
-                  <a:srgbClr val="CC0066"/>
-                </a:solidFill>
-                <a:latin typeface="Calibri"/>
-              </a:rPr>
-              <a:t>Command:</a:t>
-            </a:r>
-          </a:p>
-          <a:p>
-            <a:pPr>
-              <a:spcAft>
-                <a:spcPts val="400"/>
-              </a:spcAft>
-            </a:pPr>
-            <a:r>
-              <a:rPr sz="1100" b="0" i="0">
-                <a:solidFill>
-                  <a:srgbClr val="333333"/>
-                </a:solidFill>
-                <a:latin typeface="Calibri"/>
-              </a:rPr>
-              <a:t>bmaptool copy \</a:t>
-            </a:r>
-          </a:p>
-          <a:p>
-            <a:pPr>
-              <a:spcAft>
-                <a:spcPts val="400"/>
-              </a:spcAft>
-            </a:pPr>
-            <a:r>
-              <a:rPr sz="1100" b="0" i="0">
-                <a:solidFill>
-                  <a:srgbClr val="333333"/>
-                </a:solidFill>
-                <a:latin typeface="Calibri"/>
-              </a:rPr>
-              <a:t>  image.wic.bz2 /dev/sdX</a:t>
-            </a:r>
-          </a:p>
-          <a:p>
-            <a:pPr>
-              <a:spcAft>
-                <a:spcPts val="400"/>
-              </a:spcAft>
-            </a:pPr>
-            <a:r>
-              <a:rPr sz="1100" b="0" i="0">
-                <a:solidFill>
-                  <a:srgbClr val="333333"/>
-                </a:solidFill>
-                <a:latin typeface="Calibri"/>
-              </a:rPr>
-              <a:t/>
-            </a:r>
+            <a:endParaRPr sz="1100" b="0" i="0">
+              <a:solidFill>
+                <a:srgbClr val="333333"/>
+              </a:solidFill>
+              <a:latin typeface="Calibri"/>
+            </a:endParaRPr>
           </a:p>
           <a:p>
             <a:pPr>
@@ -5596,7 +6780,7 @@
           </a:fontRef>
         </p:style>
         <p:txBody>
-          <a:bodyPr rtlCol="0" anchor="ctr" lIns="182880"/>
+          <a:bodyPr lIns="182880" rtlCol="0" anchor="ctr"/>
           <a:lstStyle/>
           <a:p>
             <a:pPr algn="ctr"/>
@@ -5666,6 +6850,7 @@
           <a:lstStyle/>
           <a:p>
             <a:pPr algn="ctr"/>
+            <a:endParaRPr/>
           </a:p>
         </p:txBody>
       </p:sp>
@@ -5728,6 +6913,19 @@
                 <a:spcPts val="400"/>
               </a:spcAft>
             </a:pPr>
+            <a:endParaRPr sz="1100" b="0" i="0">
+              <a:solidFill>
+                <a:srgbClr val="333333"/>
+              </a:solidFill>
+              <a:latin typeface="Calibri"/>
+            </a:endParaRPr>
+          </a:p>
+          <a:p>
+            <a:pPr>
+              <a:spcAft>
+                <a:spcPts val="400"/>
+              </a:spcAft>
+            </a:pPr>
             <a:r>
               <a:rPr sz="1100" b="0" i="0">
                 <a:solidFill>
@@ -5735,7 +6933,7 @@
                 </a:solidFill>
                 <a:latin typeface="Calibri"/>
               </a:rPr>
-              <a:t/>
+              <a:t>Works with any image</a:t>
             </a:r>
           </a:p>
           <a:p>
@@ -5751,7 +6949,7 @@
                 </a:solidFill>
                 <a:latin typeface="Calibri"/>
               </a:rPr>
-              <a:t>Works with any image</a:t>
+              <a:t>type and any target</a:t>
             </a:r>
           </a:p>
           <a:p>
@@ -5760,6 +6958,35 @@
                 <a:spcPts val="400"/>
               </a:spcAft>
             </a:pPr>
+            <a:endParaRPr sz="1100" b="0" i="0">
+              <a:solidFill>
+                <a:srgbClr val="333333"/>
+              </a:solidFill>
+              <a:latin typeface="Calibri"/>
+            </a:endParaRPr>
+          </a:p>
+          <a:p>
+            <a:pPr>
+              <a:spcAft>
+                <a:spcPts val="400"/>
+              </a:spcAft>
+            </a:pPr>
+            <a:r>
+              <a:rPr sz="1200" b="1" i="0">
+                <a:solidFill>
+                  <a:srgbClr val="663399"/>
+                </a:solidFill>
+                <a:latin typeface="Calibri"/>
+              </a:rPr>
+              <a:t>Command:</a:t>
+            </a:r>
+          </a:p>
+          <a:p>
+            <a:pPr>
+              <a:spcAft>
+                <a:spcPts val="400"/>
+              </a:spcAft>
+            </a:pPr>
             <a:r>
               <a:rPr sz="1100" b="0" i="0">
                 <a:solidFill>
@@ -5767,7 +6994,7 @@
                 </a:solidFill>
                 <a:latin typeface="Calibri"/>
               </a:rPr>
-              <a:t>type and any target</a:t>
+              <a:t>sudo dd if=img.wic \</a:t>
             </a:r>
           </a:p>
           <a:p>
@@ -5783,7 +7010,7 @@
                 </a:solidFill>
                 <a:latin typeface="Calibri"/>
               </a:rPr>
-              <a:t/>
+              <a:t>  of=/dev/sdX bs=4M \</a:t>
             </a:r>
           </a:p>
           <a:p>
@@ -5793,13 +7020,13 @@
               </a:spcAft>
             </a:pPr>
             <a:r>
-              <a:rPr sz="1200" b="1" i="0">
-                <a:solidFill>
-                  <a:srgbClr val="663399"/>
+              <a:rPr sz="1100" b="0" i="0">
+                <a:solidFill>
+                  <a:srgbClr val="333333"/>
                 </a:solidFill>
                 <a:latin typeface="Calibri"/>
               </a:rPr>
-              <a:t>Command:</a:t>
+              <a:t>  status=progress</a:t>
             </a:r>
           </a:p>
           <a:p>
@@ -5808,63 +7035,12 @@
                 <a:spcPts val="400"/>
               </a:spcAft>
             </a:pPr>
-            <a:r>
-              <a:rPr sz="1100" b="0" i="0">
-                <a:solidFill>
-                  <a:srgbClr val="333333"/>
-                </a:solidFill>
-                <a:latin typeface="Calibri"/>
-              </a:rPr>
-              <a:t>sudo dd if=img.wic \</a:t>
-            </a:r>
-          </a:p>
-          <a:p>
-            <a:pPr>
-              <a:spcAft>
-                <a:spcPts val="400"/>
-              </a:spcAft>
-            </a:pPr>
-            <a:r>
-              <a:rPr sz="1100" b="0" i="0">
-                <a:solidFill>
-                  <a:srgbClr val="333333"/>
-                </a:solidFill>
-                <a:latin typeface="Calibri"/>
-              </a:rPr>
-              <a:t>  of=/dev/sdX bs=4M \</a:t>
-            </a:r>
-          </a:p>
-          <a:p>
-            <a:pPr>
-              <a:spcAft>
-                <a:spcPts val="400"/>
-              </a:spcAft>
-            </a:pPr>
-            <a:r>
-              <a:rPr sz="1100" b="0" i="0">
-                <a:solidFill>
-                  <a:srgbClr val="333333"/>
-                </a:solidFill>
-                <a:latin typeface="Calibri"/>
-              </a:rPr>
-              <a:t>  status=progress</a:t>
-            </a:r>
-          </a:p>
-          <a:p>
-            <a:pPr>
-              <a:spcAft>
-                <a:spcPts val="400"/>
-              </a:spcAft>
-            </a:pPr>
-            <a:r>
-              <a:rPr sz="1100" b="0" i="0">
-                <a:solidFill>
-                  <a:srgbClr val="333333"/>
-                </a:solidFill>
-                <a:latin typeface="Calibri"/>
-              </a:rPr>
-              <a:t/>
-            </a:r>
+            <a:endParaRPr sz="1100" b="0" i="0">
+              <a:solidFill>
+                <a:srgbClr val="333333"/>
+              </a:solidFill>
+              <a:latin typeface="Calibri"/>
+            </a:endParaRPr>
           </a:p>
           <a:p>
             <a:pPr>
@@ -5921,7 +7097,7 @@
           </a:fontRef>
         </p:style>
         <p:txBody>
-          <a:bodyPr rtlCol="0" anchor="ctr" lIns="182880"/>
+          <a:bodyPr lIns="182880" rtlCol="0" anchor="ctr"/>
           <a:lstStyle/>
           <a:p>
             <a:pPr algn="ctr"/>
@@ -5991,6 +7167,7 @@
           <a:lstStyle/>
           <a:p>
             <a:pPr algn="ctr"/>
+            <a:endParaRPr/>
           </a:p>
         </p:txBody>
       </p:sp>
@@ -6069,6 +7246,35 @@
                 <a:spcPts val="400"/>
               </a:spcAft>
             </a:pPr>
+            <a:endParaRPr sz="1100" b="0" i="0">
+              <a:solidFill>
+                <a:srgbClr val="333333"/>
+              </a:solidFill>
+              <a:latin typeface="Calibri"/>
+            </a:endParaRPr>
+          </a:p>
+          <a:p>
+            <a:pPr>
+              <a:spcAft>
+                <a:spcPts val="400"/>
+              </a:spcAft>
+            </a:pPr>
+            <a:r>
+              <a:rPr sz="1200" b="1" i="0">
+                <a:solidFill>
+                  <a:srgbClr val="CC0066"/>
+                </a:solidFill>
+                <a:latin typeface="Calibri"/>
+              </a:rPr>
+              <a:t>Examples:</a:t>
+            </a:r>
+          </a:p>
+          <a:p>
+            <a:pPr>
+              <a:spcAft>
+                <a:spcPts val="400"/>
+              </a:spcAft>
+            </a:pPr>
             <a:r>
               <a:rPr sz="1100" b="0" i="0">
                 <a:solidFill>
@@ -6076,7 +7282,7 @@
                 </a:solidFill>
                 <a:latin typeface="Calibri"/>
               </a:rPr>
-              <a:t/>
+              <a:t>• uuu (NXP i.MX)</a:t>
             </a:r>
           </a:p>
           <a:p>
@@ -6086,13 +7292,13 @@
               </a:spcAft>
             </a:pPr>
             <a:r>
-              <a:rPr sz="1200" b="1" i="0">
-                <a:solidFill>
-                  <a:srgbClr val="CC0066"/>
+              <a:rPr sz="1100" b="0" i="0">
+                <a:solidFill>
+                  <a:srgbClr val="333333"/>
                 </a:solidFill>
                 <a:latin typeface="Calibri"/>
               </a:rPr>
-              <a:t>Examples:</a:t>
+              <a:t>• mfgtool (NXP)</a:t>
             </a:r>
           </a:p>
           <a:p>
@@ -6108,7 +7314,7 @@
                 </a:solidFill>
                 <a:latin typeface="Calibri"/>
               </a:rPr>
-              <a:t>• uuu (NXP i.MX)</a:t>
+              <a:t>• rkdeveloptool (Rockchip)</a:t>
             </a:r>
           </a:p>
           <a:p>
@@ -6124,7 +7330,7 @@
                 </a:solidFill>
                 <a:latin typeface="Calibri"/>
               </a:rPr>
-              <a:t>• mfgtool (NXP)</a:t>
+              <a:t>• STM32CubeProgrammer</a:t>
             </a:r>
           </a:p>
           <a:p>
@@ -6133,47 +7339,12 @@
                 <a:spcPts val="400"/>
               </a:spcAft>
             </a:pPr>
-            <a:r>
-              <a:rPr sz="1100" b="0" i="0">
-                <a:solidFill>
-                  <a:srgbClr val="333333"/>
-                </a:solidFill>
-                <a:latin typeface="Calibri"/>
-              </a:rPr>
-              <a:t>• rkdeveloptool (Rockchip)</a:t>
-            </a:r>
-          </a:p>
-          <a:p>
-            <a:pPr>
-              <a:spcAft>
-                <a:spcPts val="400"/>
-              </a:spcAft>
-            </a:pPr>
-            <a:r>
-              <a:rPr sz="1100" b="0" i="0">
-                <a:solidFill>
-                  <a:srgbClr val="333333"/>
-                </a:solidFill>
-                <a:latin typeface="Calibri"/>
-              </a:rPr>
-              <a:t>• STM32CubeProgrammer</a:t>
-            </a:r>
-          </a:p>
-          <a:p>
-            <a:pPr>
-              <a:spcAft>
-                <a:spcPts val="400"/>
-              </a:spcAft>
-            </a:pPr>
-            <a:r>
-              <a:rPr sz="1100" b="0" i="0">
-                <a:solidFill>
-                  <a:srgbClr val="333333"/>
-                </a:solidFill>
-                <a:latin typeface="Calibri"/>
-              </a:rPr>
-              <a:t/>
-            </a:r>
+            <a:endParaRPr sz="1100" b="0" i="0">
+              <a:solidFill>
+                <a:srgbClr val="333333"/>
+              </a:solidFill>
+              <a:latin typeface="Calibri"/>
+            </a:endParaRPr>
           </a:p>
           <a:p>
             <a:pPr>
@@ -6201,8 +7372,8 @@
 </p:sld>
 </file>
 
-<file path=ppt/slides/slide11.xml><?xml version="1.0" encoding="utf-8"?>
-<p:sld xmlns:a="http://schemas.openxmlformats.org/drawingml/2006/main" xmlns:p="http://schemas.openxmlformats.org/presentationml/2006/main" xmlns:r="http://schemas.openxmlformats.org/officeDocument/2006/relationships">
+<file path=ppt/slides/slide5.xml><?xml version="1.0" encoding="utf-8"?>
+<p:sld xmlns:a="http://schemas.openxmlformats.org/drawingml/2006/main" xmlns:r="http://schemas.openxmlformats.org/officeDocument/2006/relationships" xmlns:p="http://schemas.openxmlformats.org/presentationml/2006/main">
   <p:cSld>
     <p:spTree>
       <p:nvGrpSpPr>
@@ -6210,7 +7381,14 @@
         <p:cNvGrpSpPr/>
         <p:nvPr/>
       </p:nvGrpSpPr>
-      <p:grpSpPr/>
+      <p:grpSpPr>
+        <a:xfrm>
+          <a:off x="0" y="0"/>
+          <a:ext cx="0" cy="0"/>
+          <a:chOff x="0" y="0"/>
+          <a:chExt cx="0" cy="0"/>
+        </a:xfrm>
+      </p:grpSpPr>
       <p:sp>
         <p:nvSpPr>
           <p:cNvPr id="2" name="Title 1"/>
@@ -6255,7 +7433,7 @@
           <a:noFill/>
         </p:spPr>
         <p:txBody>
-          <a:bodyPr wrap="square" anchor="t" lIns="45720" rIns="45720">
+          <a:bodyPr wrap="square" lIns="45720" rIns="45720" anchor="t">
             <a:spAutoFit/>
           </a:bodyPr>
           <a:lstStyle/>
@@ -6316,6 +7494,7 @@
           <a:lstStyle/>
           <a:p>
             <a:pPr algn="ctr"/>
+            <a:endParaRPr/>
           </a:p>
         </p:txBody>
       </p:sp>
@@ -6360,6 +7539,7 @@
           <a:lstStyle/>
           <a:p>
             <a:pPr algn="ctr"/>
+            <a:endParaRPr/>
           </a:p>
         </p:txBody>
       </p:sp>
@@ -6794,8 +7974,8 @@
 </p:sld>
 </file>
 
-<file path=ppt/slides/slide12.xml><?xml version="1.0" encoding="utf-8"?>
-<p:sld xmlns:a="http://schemas.openxmlformats.org/drawingml/2006/main" xmlns:p="http://schemas.openxmlformats.org/presentationml/2006/main" xmlns:r="http://schemas.openxmlformats.org/officeDocument/2006/relationships">
+<file path=ppt/slides/slide6.xml><?xml version="1.0" encoding="utf-8"?>
+<p:sld xmlns:a="http://schemas.openxmlformats.org/drawingml/2006/main" xmlns:r="http://schemas.openxmlformats.org/officeDocument/2006/relationships" xmlns:p="http://schemas.openxmlformats.org/presentationml/2006/main">
   <p:cSld>
     <p:spTree>
       <p:nvGrpSpPr>
@@ -6803,7 +7983,14 @@
         <p:cNvGrpSpPr/>
         <p:nvPr/>
       </p:nvGrpSpPr>
-      <p:grpSpPr/>
+      <p:grpSpPr>
+        <a:xfrm>
+          <a:off x="0" y="0"/>
+          <a:ext cx="0" cy="0"/>
+          <a:chOff x="0" y="0"/>
+          <a:chExt cx="0" cy="0"/>
+        </a:xfrm>
+      </p:grpSpPr>
       <p:sp>
         <p:nvSpPr>
           <p:cNvPr id="2" name="Title 1"/>
@@ -6848,7 +8035,7 @@
           <a:noFill/>
         </p:spPr>
         <p:txBody>
-          <a:bodyPr wrap="square" anchor="t" lIns="45720" rIns="45720">
+          <a:bodyPr wrap="square" lIns="45720" rIns="45720" anchor="t">
             <a:spAutoFit/>
           </a:bodyPr>
           <a:lstStyle/>
@@ -6903,7 +8090,7 @@
           </a:fontRef>
         </p:style>
         <p:txBody>
-          <a:bodyPr rtlCol="0" anchor="ctr" lIns="0" rIns="0"/>
+          <a:bodyPr lIns="0" rIns="0" rtlCol="0" anchor="ctr"/>
           <a:lstStyle/>
           <a:p>
             <a:pPr algn="ctr"/>
@@ -6936,7 +8123,7 @@
           <a:noFill/>
         </p:spPr>
         <p:txBody>
-          <a:bodyPr wrap="square" anchor="t" lIns="45720" rIns="45720">
+          <a:bodyPr wrap="square" lIns="45720" rIns="45720" anchor="t">
             <a:spAutoFit/>
           </a:bodyPr>
           <a:lstStyle/>
@@ -6971,7 +8158,7 @@
           <a:noFill/>
         </p:spPr>
         <p:txBody>
-          <a:bodyPr wrap="square" anchor="t" lIns="45720" rIns="45720">
+          <a:bodyPr wrap="square" lIns="45720" rIns="45720" anchor="t">
             <a:spAutoFit/>
           </a:bodyPr>
           <a:lstStyle/>
@@ -7026,7 +8213,7 @@
           </a:fontRef>
         </p:style>
         <p:txBody>
-          <a:bodyPr rtlCol="0" anchor="ctr" lIns="0" rIns="0"/>
+          <a:bodyPr lIns="0" rIns="0" rtlCol="0" anchor="ctr"/>
           <a:lstStyle/>
           <a:p>
             <a:pPr algn="ctr"/>
@@ -7059,7 +8246,7 @@
           <a:noFill/>
         </p:spPr>
         <p:txBody>
-          <a:bodyPr wrap="square" anchor="t" lIns="45720" rIns="45720">
+          <a:bodyPr wrap="square" lIns="45720" rIns="45720" anchor="t">
             <a:spAutoFit/>
           </a:bodyPr>
           <a:lstStyle/>
@@ -7094,7 +8281,7 @@
           <a:noFill/>
         </p:spPr>
         <p:txBody>
-          <a:bodyPr wrap="square" anchor="t" lIns="45720" rIns="45720">
+          <a:bodyPr wrap="square" lIns="45720" rIns="45720" anchor="t">
             <a:spAutoFit/>
           </a:bodyPr>
           <a:lstStyle/>
@@ -7149,7 +8336,7 @@
           </a:fontRef>
         </p:style>
         <p:txBody>
-          <a:bodyPr rtlCol="0" anchor="ctr" lIns="0" rIns="0"/>
+          <a:bodyPr lIns="0" rIns="0" rtlCol="0" anchor="ctr"/>
           <a:lstStyle/>
           <a:p>
             <a:pPr algn="ctr"/>
@@ -7182,7 +8369,7 @@
           <a:noFill/>
         </p:spPr>
         <p:txBody>
-          <a:bodyPr wrap="square" anchor="t" lIns="45720" rIns="45720">
+          <a:bodyPr wrap="square" lIns="45720" rIns="45720" anchor="t">
             <a:spAutoFit/>
           </a:bodyPr>
           <a:lstStyle/>
@@ -7217,7 +8404,7 @@
           <a:noFill/>
         </p:spPr>
         <p:txBody>
-          <a:bodyPr wrap="square" anchor="t" lIns="45720" rIns="45720">
+          <a:bodyPr wrap="square" lIns="45720" rIns="45720" anchor="t">
             <a:spAutoFit/>
           </a:bodyPr>
           <a:lstStyle/>
@@ -7272,7 +8459,7 @@
           </a:fontRef>
         </p:style>
         <p:txBody>
-          <a:bodyPr rtlCol="0" anchor="ctr" lIns="0" rIns="0"/>
+          <a:bodyPr lIns="0" rIns="0" rtlCol="0" anchor="ctr"/>
           <a:lstStyle/>
           <a:p>
             <a:pPr algn="ctr"/>
@@ -7305,7 +8492,7 @@
           <a:noFill/>
         </p:spPr>
         <p:txBody>
-          <a:bodyPr wrap="square" anchor="t" lIns="45720" rIns="45720">
+          <a:bodyPr wrap="square" lIns="45720" rIns="45720" anchor="t">
             <a:spAutoFit/>
           </a:bodyPr>
           <a:lstStyle/>
@@ -7340,7 +8527,7 @@
           <a:noFill/>
         </p:spPr>
         <p:txBody>
-          <a:bodyPr wrap="square" anchor="t" lIns="45720" rIns="45720">
+          <a:bodyPr wrap="square" lIns="45720" rIns="45720" anchor="t">
             <a:spAutoFit/>
           </a:bodyPr>
           <a:lstStyle/>
@@ -7395,7 +8582,7 @@
           </a:fontRef>
         </p:style>
         <p:txBody>
-          <a:bodyPr rtlCol="0" anchor="ctr" lIns="0" rIns="0"/>
+          <a:bodyPr lIns="0" rIns="0" rtlCol="0" anchor="ctr"/>
           <a:lstStyle/>
           <a:p>
             <a:pPr algn="ctr"/>
@@ -7428,7 +8615,7 @@
           <a:noFill/>
         </p:spPr>
         <p:txBody>
-          <a:bodyPr wrap="square" anchor="t" lIns="45720" rIns="45720">
+          <a:bodyPr wrap="square" lIns="45720" rIns="45720" anchor="t">
             <a:spAutoFit/>
           </a:bodyPr>
           <a:lstStyle/>
@@ -7463,7 +8650,7 @@
           <a:noFill/>
         </p:spPr>
         <p:txBody>
-          <a:bodyPr wrap="square" anchor="t" lIns="45720" rIns="45720">
+          <a:bodyPr wrap="square" lIns="45720" rIns="45720" anchor="t">
             <a:spAutoFit/>
           </a:bodyPr>
           <a:lstStyle/>
@@ -7489,8 +8676,8 @@
 </p:sld>
 </file>
 
-<file path=ppt/slides/slide13.xml><?xml version="1.0" encoding="utf-8"?>
-<p:sld xmlns:a="http://schemas.openxmlformats.org/drawingml/2006/main" xmlns:p="http://schemas.openxmlformats.org/presentationml/2006/main" xmlns:r="http://schemas.openxmlformats.org/officeDocument/2006/relationships">
+<file path=ppt/slides/slide7.xml><?xml version="1.0" encoding="utf-8"?>
+<p:sld xmlns:a="http://schemas.openxmlformats.org/drawingml/2006/main" xmlns:r="http://schemas.openxmlformats.org/officeDocument/2006/relationships" xmlns:p="http://schemas.openxmlformats.org/presentationml/2006/main">
   <p:cSld>
     <p:spTree>
       <p:nvGrpSpPr>
@@ -7498,7 +8685,14 @@
         <p:cNvGrpSpPr/>
         <p:nvPr/>
       </p:nvGrpSpPr>
-      <p:grpSpPr/>
+      <p:grpSpPr>
+        <a:xfrm>
+          <a:off x="0" y="0"/>
+          <a:ext cx="0" cy="0"/>
+          <a:chOff x="0" y="0"/>
+          <a:chExt cx="0" cy="0"/>
+        </a:xfrm>
+      </p:grpSpPr>
       <p:sp>
         <p:nvSpPr>
           <p:cNvPr id="2" name="Title 1"/>
@@ -7543,7 +8737,7 @@
           <a:noFill/>
         </p:spPr>
         <p:txBody>
-          <a:bodyPr wrap="square" anchor="t" lIns="45720" rIns="45720">
+          <a:bodyPr wrap="square" lIns="45720" rIns="45720" anchor="t">
             <a:spAutoFit/>
           </a:bodyPr>
           <a:lstStyle/>
@@ -7604,6 +8798,7 @@
           <a:lstStyle/>
           <a:p>
             <a:pPr algn="ctr"/>
+            <a:endParaRPr/>
           </a:p>
         </p:txBody>
       </p:sp>
@@ -7648,6 +8843,7 @@
           <a:lstStyle/>
           <a:p>
             <a:pPr algn="ctr"/>
+            <a:endParaRPr/>
           </a:p>
         </p:txBody>
       </p:sp>
@@ -8050,8 +9246,8 @@
 </p:sld>
 </file>
 
-<file path=ppt/slides/slide14.xml><?xml version="1.0" encoding="utf-8"?>
-<p:sld xmlns:a="http://schemas.openxmlformats.org/drawingml/2006/main" xmlns:p="http://schemas.openxmlformats.org/presentationml/2006/main" xmlns:r="http://schemas.openxmlformats.org/officeDocument/2006/relationships">
+<file path=ppt/slides/slide8.xml><?xml version="1.0" encoding="utf-8"?>
+<p:sld xmlns:a="http://schemas.openxmlformats.org/drawingml/2006/main" xmlns:r="http://schemas.openxmlformats.org/officeDocument/2006/relationships" xmlns:p="http://schemas.openxmlformats.org/presentationml/2006/main">
   <p:cSld>
     <p:spTree>
       <p:nvGrpSpPr>
@@ -8059,7 +9255,14 @@
         <p:cNvGrpSpPr/>
         <p:nvPr/>
       </p:nvGrpSpPr>
-      <p:grpSpPr/>
+      <p:grpSpPr>
+        <a:xfrm>
+          <a:off x="0" y="0"/>
+          <a:ext cx="0" cy="0"/>
+          <a:chOff x="0" y="0"/>
+          <a:chExt cx="0" cy="0"/>
+        </a:xfrm>
+      </p:grpSpPr>
       <p:sp>
         <p:nvSpPr>
           <p:cNvPr id="2" name="Title 1"/>
@@ -8104,7 +9307,7 @@
           <a:noFill/>
         </p:spPr>
         <p:txBody>
-          <a:bodyPr wrap="square" anchor="t" lIns="45720" rIns="45720">
+          <a:bodyPr wrap="square" lIns="45720" rIns="45720" anchor="t">
             <a:spAutoFit/>
           </a:bodyPr>
           <a:lstStyle/>
@@ -8159,7 +9362,7 @@
           </a:fontRef>
         </p:style>
         <p:txBody>
-          <a:bodyPr rtlCol="0" anchor="ctr" lIns="0" rIns="0"/>
+          <a:bodyPr lIns="0" rIns="0" rtlCol="0" anchor="ctr"/>
           <a:lstStyle/>
           <a:p>
             <a:pPr algn="ctr"/>
@@ -8192,7 +9395,7 @@
           <a:noFill/>
         </p:spPr>
         <p:txBody>
-          <a:bodyPr wrap="square" anchor="t" lIns="45720" rIns="45720">
+          <a:bodyPr wrap="square" lIns="45720" rIns="45720" anchor="t">
             <a:spAutoFit/>
           </a:bodyPr>
           <a:lstStyle/>
@@ -8227,7 +9430,7 @@
           <a:noFill/>
         </p:spPr>
         <p:txBody>
-          <a:bodyPr wrap="square" anchor="t" lIns="45720" rIns="45720">
+          <a:bodyPr wrap="square" lIns="45720" rIns="45720" anchor="t">
             <a:spAutoFit/>
           </a:bodyPr>
           <a:lstStyle/>
@@ -8282,7 +9485,7 @@
           </a:fontRef>
         </p:style>
         <p:txBody>
-          <a:bodyPr rtlCol="0" anchor="ctr" lIns="0" rIns="0"/>
+          <a:bodyPr lIns="0" rIns="0" rtlCol="0" anchor="ctr"/>
           <a:lstStyle/>
           <a:p>
             <a:pPr algn="ctr"/>
@@ -8315,7 +9518,7 @@
           <a:noFill/>
         </p:spPr>
         <p:txBody>
-          <a:bodyPr wrap="square" anchor="t" lIns="45720" rIns="45720">
+          <a:bodyPr wrap="square" lIns="45720" rIns="45720" anchor="t">
             <a:spAutoFit/>
           </a:bodyPr>
           <a:lstStyle/>
@@ -8350,7 +9553,7 @@
           <a:noFill/>
         </p:spPr>
         <p:txBody>
-          <a:bodyPr wrap="square" anchor="t" lIns="45720" rIns="45720">
+          <a:bodyPr wrap="square" lIns="45720" rIns="45720" anchor="t">
             <a:spAutoFit/>
           </a:bodyPr>
           <a:lstStyle/>
@@ -8405,7 +9608,7 @@
           </a:fontRef>
         </p:style>
         <p:txBody>
-          <a:bodyPr rtlCol="0" anchor="ctr" lIns="0" rIns="0"/>
+          <a:bodyPr lIns="0" rIns="0" rtlCol="0" anchor="ctr"/>
           <a:lstStyle/>
           <a:p>
             <a:pPr algn="ctr"/>
@@ -8438,7 +9641,7 @@
           <a:noFill/>
         </p:spPr>
         <p:txBody>
-          <a:bodyPr wrap="square" anchor="t" lIns="45720" rIns="45720">
+          <a:bodyPr wrap="square" lIns="45720" rIns="45720" anchor="t">
             <a:spAutoFit/>
           </a:bodyPr>
           <a:lstStyle/>
@@ -8473,7 +9676,7 @@
           <a:noFill/>
         </p:spPr>
         <p:txBody>
-          <a:bodyPr wrap="square" anchor="t" lIns="45720" rIns="45720">
+          <a:bodyPr wrap="square" lIns="45720" rIns="45720" anchor="t">
             <a:spAutoFit/>
           </a:bodyPr>
           <a:lstStyle/>
@@ -8528,7 +9731,7 @@
           </a:fontRef>
         </p:style>
         <p:txBody>
-          <a:bodyPr rtlCol="0" anchor="ctr" lIns="0" rIns="0"/>
+          <a:bodyPr lIns="0" rIns="0" rtlCol="0" anchor="ctr"/>
           <a:lstStyle/>
           <a:p>
             <a:pPr algn="ctr"/>
@@ -8561,7 +9764,7 @@
           <a:noFill/>
         </p:spPr>
         <p:txBody>
-          <a:bodyPr wrap="square" anchor="t" lIns="45720" rIns="45720">
+          <a:bodyPr wrap="square" lIns="45720" rIns="45720" anchor="t">
             <a:spAutoFit/>
           </a:bodyPr>
           <a:lstStyle/>
@@ -8596,7 +9799,7 @@
           <a:noFill/>
         </p:spPr>
         <p:txBody>
-          <a:bodyPr wrap="square" anchor="t" lIns="45720" rIns="45720">
+          <a:bodyPr wrap="square" lIns="45720" rIns="45720" anchor="t">
             <a:spAutoFit/>
           </a:bodyPr>
           <a:lstStyle/>
@@ -8651,7 +9854,7 @@
           </a:fontRef>
         </p:style>
         <p:txBody>
-          <a:bodyPr rtlCol="0" anchor="ctr" lIns="0" rIns="0"/>
+          <a:bodyPr lIns="0" rIns="0" rtlCol="0" anchor="ctr"/>
           <a:lstStyle/>
           <a:p>
             <a:pPr algn="ctr"/>
@@ -8684,7 +9887,7 @@
           <a:noFill/>
         </p:spPr>
         <p:txBody>
-          <a:bodyPr wrap="square" anchor="t" lIns="45720" rIns="45720">
+          <a:bodyPr wrap="square" lIns="45720" rIns="45720" anchor="t">
             <a:spAutoFit/>
           </a:bodyPr>
           <a:lstStyle/>
@@ -8719,7 +9922,7 @@
           <a:noFill/>
         </p:spPr>
         <p:txBody>
-          <a:bodyPr wrap="square" anchor="t" lIns="45720" rIns="45720">
+          <a:bodyPr wrap="square" lIns="45720" rIns="45720" anchor="t">
             <a:spAutoFit/>
           </a:bodyPr>
           <a:lstStyle/>
@@ -8774,7 +9977,7 @@
           </a:fontRef>
         </p:style>
         <p:txBody>
-          <a:bodyPr rtlCol="0" anchor="ctr" lIns="228600"/>
+          <a:bodyPr lIns="228600" rtlCol="0" anchor="ctr"/>
           <a:lstStyle/>
           <a:p>
             <a:pPr algn="ctr"/>
@@ -8795,1172 +9998,6 @@
                 <a:latin typeface="Calibri"/>
               </a:rPr>
               <a:t>Day-to-day operations (105 min)</a:t>
-            </a:r>
-          </a:p>
-        </p:txBody>
-      </p:sp>
-    </p:spTree>
-  </p:cSld>
-  <p:clrMapOvr>
-    <a:masterClrMapping/>
-  </p:clrMapOvr>
-</p:sld>
-</file>
-
-<file path=ppt/slides/slide7.xml><?xml version="1.0" encoding="utf-8"?>
-<p:sld xmlns:a="http://schemas.openxmlformats.org/drawingml/2006/main" xmlns:p="http://schemas.openxmlformats.org/presentationml/2006/main" xmlns:r="http://schemas.openxmlformats.org/officeDocument/2006/relationships">
-  <p:cSld>
-    <p:spTree>
-      <p:nvGrpSpPr>
-        <p:cNvPr id="1" name=""/>
-        <p:cNvGrpSpPr/>
-        <p:nvPr/>
-      </p:nvGrpSpPr>
-      <p:grpSpPr/>
-      <p:sp>
-        <p:nvSpPr>
-          <p:cNvPr id="2" name="Title 1"/>
-          <p:cNvSpPr>
-            <a:spLocks noGrp="1"/>
-          </p:cNvSpPr>
-          <p:nvPr>
-            <p:ph type="ctrTitle"/>
-          </p:nvPr>
-        </p:nvSpPr>
-        <p:spPr/>
-        <p:txBody>
-          <a:bodyPr/>
-          <a:lstStyle/>
-          <a:p>
-            <a:r>
-              <a:rPr sz="4400" b="1">
-                <a:solidFill>
-                  <a:srgbClr val="FFFFFF"/>
-                </a:solidFill>
-                <a:latin typeface="Calibri"/>
-              </a:rPr>
-              <a:t>Boot, Flash, Verify</a:t>
-            </a:r>
-          </a:p>
-        </p:txBody>
-      </p:sp>
-      <p:sp>
-        <p:nvSpPr>
-          <p:cNvPr id="3" name="Subtitle 2"/>
-          <p:cNvSpPr>
-            <a:spLocks noGrp="1"/>
-          </p:cNvSpPr>
-          <p:nvPr>
-            <p:ph type="subTitle" idx="1"/>
-          </p:nvPr>
-        </p:nvSpPr>
-        <p:spPr/>
-        <p:txBody>
-          <a:bodyPr/>
-          <a:lstStyle/>
-          <a:p>
-            <a:r>
-              <a:rPr sz="2200" i="1">
-                <a:solidFill>
-                  <a:srgbClr val="FFFFFF"/>
-                </a:solidFill>
-                <a:latin typeface="Calibri"/>
-              </a:rPr>
-              <a:t>Day 4 • Session 2 • 75 minutes</a:t>
-            </a:r>
-          </a:p>
-          <a:p>
-            <a:r>
-              <a:rPr sz="1800">
-                <a:solidFill>
-                  <a:srgbClr val="FFFFFF"/>
-                </a:solidFill>
-                <a:latin typeface="Calibri"/>
-              </a:rPr>
-              <a:t>From image artifact to a working device</a:t>
-            </a:r>
-          </a:p>
-        </p:txBody>
-      </p:sp>
-    </p:spTree>
-  </p:cSld>
-  <p:clrMapOvr>
-    <a:masterClrMapping/>
-  </p:clrMapOvr>
-</p:sld>
-</file>
-
-<file path=ppt/slides/slide8.xml><?xml version="1.0" encoding="utf-8"?>
-<p:sld xmlns:a="http://schemas.openxmlformats.org/drawingml/2006/main" xmlns:p="http://schemas.openxmlformats.org/presentationml/2006/main" xmlns:r="http://schemas.openxmlformats.org/officeDocument/2006/relationships">
-  <p:cSld>
-    <p:spTree>
-      <p:nvGrpSpPr>
-        <p:cNvPr id="1" name=""/>
-        <p:cNvGrpSpPr/>
-        <p:nvPr/>
-      </p:nvGrpSpPr>
-      <p:grpSpPr/>
-      <p:sp>
-        <p:nvSpPr>
-          <p:cNvPr id="2" name="Title 1"/>
-          <p:cNvSpPr>
-            <a:spLocks noGrp="1"/>
-          </p:cNvSpPr>
-          <p:nvPr>
-            <p:ph type="title"/>
-          </p:nvPr>
-        </p:nvSpPr>
-        <p:spPr/>
-        <p:txBody>
-          <a:bodyPr/>
-          <a:lstStyle/>
-          <a:p>
-            <a:r>
-              <a:rPr sz="3200" b="1">
-                <a:solidFill>
-                  <a:srgbClr val="CC0066"/>
-                </a:solidFill>
-                <a:latin typeface="Calibri"/>
-              </a:rPr>
-              <a:t>Session Agenda</a:t>
-            </a:r>
-          </a:p>
-        </p:txBody>
-      </p:sp>
-      <p:sp>
-        <p:nvSpPr>
-          <p:cNvPr id="3" name="TextBox 2"/>
-          <p:cNvSpPr txBox="1"/>
-          <p:nvPr/>
-        </p:nvSpPr>
-        <p:spPr>
-          <a:xfrm>
-            <a:off x="822960" y="1463040"/>
-            <a:ext cx="10515600" cy="5029200"/>
-          </a:xfrm>
-          <a:prstGeom prst="rect">
-            <a:avLst/>
-          </a:prstGeom>
-          <a:noFill/>
-        </p:spPr>
-        <p:txBody>
-          <a:bodyPr wrap="square" lIns="45720" rIns="45720">
-            <a:spAutoFit/>
-          </a:bodyPr>
-          <a:lstStyle/>
-          <a:p>
-            <a:pPr>
-              <a:spcAft>
-                <a:spcPts val="600"/>
-              </a:spcAft>
-            </a:pPr>
-            <a:r>
-              <a:rPr sz="2000" b="0" i="0">
-                <a:solidFill>
-                  <a:srgbClr val="333333"/>
-                </a:solidFill>
-                <a:latin typeface="Calibri"/>
-              </a:rPr>
-              <a:t>1.  Boot flow on a real device</a:t>
-            </a:r>
-          </a:p>
-          <a:p>
-            <a:pPr>
-              <a:spcAft>
-                <a:spcPts val="600"/>
-              </a:spcAft>
-            </a:pPr>
-            <a:r>
-              <a:rPr sz="2000" b="0" i="0">
-                <a:solidFill>
-                  <a:srgbClr val="333333"/>
-                </a:solidFill>
-                <a:latin typeface="Calibri"/>
-              </a:rPr>
-              <a:t>2.  Flashing — wic, sdcard, raw partitions</a:t>
-            </a:r>
-          </a:p>
-          <a:p>
-            <a:pPr>
-              <a:spcAft>
-                <a:spcPts val="600"/>
-              </a:spcAft>
-            </a:pPr>
-            <a:r>
-              <a:rPr sz="2000" b="0" i="0">
-                <a:solidFill>
-                  <a:srgbClr val="333333"/>
-                </a:solidFill>
-                <a:latin typeface="Calibri"/>
-              </a:rPr>
-              <a:t>3.  First-boot checklist</a:t>
-            </a:r>
-          </a:p>
-          <a:p>
-            <a:pPr>
-              <a:spcAft>
-                <a:spcPts val="600"/>
-              </a:spcAft>
-            </a:pPr>
-            <a:r>
-              <a:rPr sz="2000" b="0" i="0">
-                <a:solidFill>
-                  <a:srgbClr val="333333"/>
-                </a:solidFill>
-                <a:latin typeface="Calibri"/>
-              </a:rPr>
-              <a:t>4.  Common bring-up failures</a:t>
-            </a:r>
-          </a:p>
-          <a:p>
-            <a:pPr>
-              <a:spcAft>
-                <a:spcPts val="600"/>
-              </a:spcAft>
-            </a:pPr>
-            <a:r>
-              <a:rPr sz="2000" b="0" i="0">
-                <a:solidFill>
-                  <a:srgbClr val="333333"/>
-                </a:solidFill>
-                <a:latin typeface="Calibri"/>
-              </a:rPr>
-              <a:t>5.  Validating the boot was clean</a:t>
-            </a:r>
-          </a:p>
-        </p:txBody>
-      </p:sp>
-    </p:spTree>
-  </p:cSld>
-  <p:clrMapOvr>
-    <a:masterClrMapping/>
-  </p:clrMapOvr>
-</p:sld>
-</file>
-
-<file path=ppt/slides/slide9.xml><?xml version="1.0" encoding="utf-8"?>
-<p:sld xmlns:a="http://schemas.openxmlformats.org/drawingml/2006/main" xmlns:p="http://schemas.openxmlformats.org/presentationml/2006/main" xmlns:r="http://schemas.openxmlformats.org/officeDocument/2006/relationships">
-  <p:cSld>
-    <p:spTree>
-      <p:nvGrpSpPr>
-        <p:cNvPr id="1" name=""/>
-        <p:cNvGrpSpPr/>
-        <p:nvPr/>
-      </p:nvGrpSpPr>
-      <p:grpSpPr/>
-      <p:sp>
-        <p:nvSpPr>
-          <p:cNvPr id="2" name="Title 1"/>
-          <p:cNvSpPr>
-            <a:spLocks noGrp="1"/>
-          </p:cNvSpPr>
-          <p:nvPr>
-            <p:ph type="title"/>
-          </p:nvPr>
-        </p:nvSpPr>
-        <p:spPr/>
-        <p:txBody>
-          <a:bodyPr/>
-          <a:lstStyle/>
-          <a:p>
-            <a:r>
-              <a:rPr sz="3200" b="1">
-                <a:solidFill>
-                  <a:srgbClr val="CC0066"/>
-                </a:solidFill>
-                <a:latin typeface="Calibri"/>
-              </a:rPr>
-              <a:t>Boot Flow on a Real Device</a:t>
-            </a:r>
-          </a:p>
-        </p:txBody>
-      </p:sp>
-      <p:sp>
-        <p:nvSpPr>
-          <p:cNvPr id="3" name="TextBox 2"/>
-          <p:cNvSpPr txBox="1"/>
-          <p:nvPr/>
-        </p:nvSpPr>
-        <p:spPr>
-          <a:xfrm>
-            <a:off x="822960" y="1417320"/>
-            <a:ext cx="10515600" cy="365760"/>
-          </a:xfrm>
-          <a:prstGeom prst="rect">
-            <a:avLst/>
-          </a:prstGeom>
-          <a:noFill/>
-        </p:spPr>
-        <p:txBody>
-          <a:bodyPr wrap="square" anchor="t" lIns="45720" rIns="45720">
-            <a:spAutoFit/>
-          </a:bodyPr>
-          <a:lstStyle/>
-          <a:p>
-            <a:pPr algn="l"/>
-            <a:r>
-              <a:rPr sz="1500" b="0" i="1">
-                <a:solidFill>
-                  <a:srgbClr val="666666"/>
-                </a:solidFill>
-                <a:latin typeface="Calibri"/>
-              </a:rPr>
-              <a:t>What happens between power and login.</a:t>
-            </a:r>
-          </a:p>
-        </p:txBody>
-      </p:sp>
-      <p:sp>
-        <p:nvSpPr>
-          <p:cNvPr id="4" name="Rounded Rectangle 3"/>
-          <p:cNvSpPr/>
-          <p:nvPr/>
-        </p:nvSpPr>
-        <p:spPr>
-          <a:xfrm>
-            <a:off x="379476" y="2103120"/>
-            <a:ext cx="1388745" cy="640080"/>
-          </a:xfrm>
-          <a:prstGeom prst="roundRect">
-            <a:avLst/>
-          </a:prstGeom>
-          <a:solidFill>
-            <a:srgbClr val="FCE4EC"/>
-          </a:solidFill>
-          <a:ln w="6350">
-            <a:solidFill>
-              <a:srgbClr val="CC0066"/>
-            </a:solidFill>
-          </a:ln>
-          <a:effectLst/>
-        </p:spPr>
-        <p:style>
-          <a:lnRef idx="1">
-            <a:schemeClr val="accent1"/>
-          </a:lnRef>
-          <a:fillRef idx="3">
-            <a:schemeClr val="accent1"/>
-          </a:fillRef>
-          <a:effectRef idx="2">
-            <a:schemeClr val="accent1"/>
-          </a:effectRef>
-          <a:fontRef idx="minor">
-            <a:schemeClr val="lt1"/>
-          </a:fontRef>
-        </p:style>
-        <p:txBody>
-          <a:bodyPr rtlCol="0" anchor="ctr" lIns="18288" rIns="18288"/>
-          <a:lstStyle/>
-          <a:p>
-            <a:pPr algn="ctr"/>
-            <a:r>
-              <a:rPr sz="1100" b="1">
-                <a:solidFill>
-                  <a:srgbClr val="663399"/>
-                </a:solidFill>
-                <a:latin typeface="Consolas"/>
-              </a:rPr>
-              <a:t>Power</a:t>
-            </a:r>
-          </a:p>
-        </p:txBody>
-      </p:sp>
-      <p:sp>
-        <p:nvSpPr>
-          <p:cNvPr id="5" name="TextBox 4"/>
-          <p:cNvSpPr txBox="1"/>
-          <p:nvPr/>
-        </p:nvSpPr>
-        <p:spPr>
-          <a:xfrm>
-            <a:off x="379476" y="2788920"/>
-            <a:ext cx="1388745" cy="320040"/>
-          </a:xfrm>
-          <a:prstGeom prst="rect">
-            <a:avLst/>
-          </a:prstGeom>
-          <a:noFill/>
-        </p:spPr>
-        <p:txBody>
-          <a:bodyPr wrap="square" anchor="t" lIns="45720" rIns="45720">
-            <a:spAutoFit/>
-          </a:bodyPr>
-          <a:lstStyle/>
-          <a:p>
-            <a:pPr algn="ctr"/>
-            <a:r>
-              <a:rPr sz="900" b="0" i="0">
-                <a:solidFill>
-                  <a:srgbClr val="666666"/>
-                </a:solidFill>
-                <a:latin typeface="Calibri"/>
-              </a:rPr>
-              <a:t>Reset</a:t>
-            </a:r>
-          </a:p>
-        </p:txBody>
-      </p:sp>
-      <p:sp>
-        <p:nvSpPr>
-          <p:cNvPr id="6" name="Rounded Rectangle 5"/>
-          <p:cNvSpPr/>
-          <p:nvPr/>
-        </p:nvSpPr>
-        <p:spPr>
-          <a:xfrm>
-            <a:off x="1813941" y="2103120"/>
-            <a:ext cx="1388745" cy="640080"/>
-          </a:xfrm>
-          <a:prstGeom prst="roundRect">
-            <a:avLst/>
-          </a:prstGeom>
-          <a:solidFill>
-            <a:srgbClr val="FCE4EC"/>
-          </a:solidFill>
-          <a:ln w="6350">
-            <a:solidFill>
-              <a:srgbClr val="CC0066"/>
-            </a:solidFill>
-          </a:ln>
-          <a:effectLst/>
-        </p:spPr>
-        <p:style>
-          <a:lnRef idx="1">
-            <a:schemeClr val="accent1"/>
-          </a:lnRef>
-          <a:fillRef idx="3">
-            <a:schemeClr val="accent1"/>
-          </a:fillRef>
-          <a:effectRef idx="2">
-            <a:schemeClr val="accent1"/>
-          </a:effectRef>
-          <a:fontRef idx="minor">
-            <a:schemeClr val="lt1"/>
-          </a:fontRef>
-        </p:style>
-        <p:txBody>
-          <a:bodyPr rtlCol="0" anchor="ctr" lIns="18288" rIns="18288"/>
-          <a:lstStyle/>
-          <a:p>
-            <a:pPr algn="ctr"/>
-            <a:r>
-              <a:rPr sz="1100" b="1">
-                <a:solidFill>
-                  <a:srgbClr val="663399"/>
-                </a:solidFill>
-                <a:latin typeface="Consolas"/>
-              </a:rPr>
-              <a:t>ROM</a:t>
-            </a:r>
-          </a:p>
-        </p:txBody>
-      </p:sp>
-      <p:sp>
-        <p:nvSpPr>
-          <p:cNvPr id="7" name="TextBox 6"/>
-          <p:cNvSpPr txBox="1"/>
-          <p:nvPr/>
-        </p:nvSpPr>
-        <p:spPr>
-          <a:xfrm>
-            <a:off x="1813941" y="2788920"/>
-            <a:ext cx="1388745" cy="320040"/>
-          </a:xfrm>
-          <a:prstGeom prst="rect">
-            <a:avLst/>
-          </a:prstGeom>
-          <a:noFill/>
-        </p:spPr>
-        <p:txBody>
-          <a:bodyPr wrap="square" anchor="t" lIns="45720" rIns="45720">
-            <a:spAutoFit/>
-          </a:bodyPr>
-          <a:lstStyle/>
-          <a:p>
-            <a:pPr algn="ctr"/>
-            <a:r>
-              <a:rPr sz="900" b="0" i="0">
-                <a:solidFill>
-                  <a:srgbClr val="666666"/>
-                </a:solidFill>
-                <a:latin typeface="Calibri"/>
-              </a:rPr>
-              <a:t>Vendor</a:t>
-            </a:r>
-          </a:p>
-        </p:txBody>
-      </p:sp>
-      <p:sp>
-        <p:nvSpPr>
-          <p:cNvPr id="8" name="Rounded Rectangle 7"/>
-          <p:cNvSpPr/>
-          <p:nvPr/>
-        </p:nvSpPr>
-        <p:spPr>
-          <a:xfrm>
-            <a:off x="3248406" y="2103120"/>
-            <a:ext cx="1388745" cy="640080"/>
-          </a:xfrm>
-          <a:prstGeom prst="roundRect">
-            <a:avLst/>
-          </a:prstGeom>
-          <a:solidFill>
-            <a:srgbClr val="FCE4EC"/>
-          </a:solidFill>
-          <a:ln w="6350">
-            <a:solidFill>
-              <a:srgbClr val="CC0066"/>
-            </a:solidFill>
-          </a:ln>
-          <a:effectLst/>
-        </p:spPr>
-        <p:style>
-          <a:lnRef idx="1">
-            <a:schemeClr val="accent1"/>
-          </a:lnRef>
-          <a:fillRef idx="3">
-            <a:schemeClr val="accent1"/>
-          </a:fillRef>
-          <a:effectRef idx="2">
-            <a:schemeClr val="accent1"/>
-          </a:effectRef>
-          <a:fontRef idx="minor">
-            <a:schemeClr val="lt1"/>
-          </a:fontRef>
-        </p:style>
-        <p:txBody>
-          <a:bodyPr rtlCol="0" anchor="ctr" lIns="18288" rIns="18288"/>
-          <a:lstStyle/>
-          <a:p>
-            <a:pPr algn="ctr"/>
-            <a:r>
-              <a:rPr sz="1100" b="1">
-                <a:solidFill>
-                  <a:srgbClr val="663399"/>
-                </a:solidFill>
-                <a:latin typeface="Consolas"/>
-              </a:rPr>
-              <a:t>SPL</a:t>
-            </a:r>
-          </a:p>
-        </p:txBody>
-      </p:sp>
-      <p:sp>
-        <p:nvSpPr>
-          <p:cNvPr id="9" name="TextBox 8"/>
-          <p:cNvSpPr txBox="1"/>
-          <p:nvPr/>
-        </p:nvSpPr>
-        <p:spPr>
-          <a:xfrm>
-            <a:off x="3248406" y="2788920"/>
-            <a:ext cx="1388745" cy="320040"/>
-          </a:xfrm>
-          <a:prstGeom prst="rect">
-            <a:avLst/>
-          </a:prstGeom>
-          <a:noFill/>
-        </p:spPr>
-        <p:txBody>
-          <a:bodyPr wrap="square" anchor="t" lIns="45720" rIns="45720">
-            <a:spAutoFit/>
-          </a:bodyPr>
-          <a:lstStyle/>
-          <a:p>
-            <a:pPr algn="ctr"/>
-            <a:r>
-              <a:rPr sz="900" b="0" i="0">
-                <a:solidFill>
-                  <a:srgbClr val="666666"/>
-                </a:solidFill>
-                <a:latin typeface="Calibri"/>
-              </a:rPr>
-              <a:t>Stage 1</a:t>
-            </a:r>
-          </a:p>
-        </p:txBody>
-      </p:sp>
-      <p:sp>
-        <p:nvSpPr>
-          <p:cNvPr id="10" name="Rounded Rectangle 9"/>
-          <p:cNvSpPr/>
-          <p:nvPr/>
-        </p:nvSpPr>
-        <p:spPr>
-          <a:xfrm>
-            <a:off x="4682871" y="2103120"/>
-            <a:ext cx="1388745" cy="640080"/>
-          </a:xfrm>
-          <a:prstGeom prst="roundRect">
-            <a:avLst/>
-          </a:prstGeom>
-          <a:solidFill>
-            <a:srgbClr val="FCE4EC"/>
-          </a:solidFill>
-          <a:ln w="6350">
-            <a:solidFill>
-              <a:srgbClr val="CC0066"/>
-            </a:solidFill>
-          </a:ln>
-          <a:effectLst/>
-        </p:spPr>
-        <p:style>
-          <a:lnRef idx="1">
-            <a:schemeClr val="accent1"/>
-          </a:lnRef>
-          <a:fillRef idx="3">
-            <a:schemeClr val="accent1"/>
-          </a:fillRef>
-          <a:effectRef idx="2">
-            <a:schemeClr val="accent1"/>
-          </a:effectRef>
-          <a:fontRef idx="minor">
-            <a:schemeClr val="lt1"/>
-          </a:fontRef>
-        </p:style>
-        <p:txBody>
-          <a:bodyPr rtlCol="0" anchor="ctr" lIns="18288" rIns="18288"/>
-          <a:lstStyle/>
-          <a:p>
-            <a:pPr algn="ctr"/>
-            <a:r>
-              <a:rPr sz="1100" b="1">
-                <a:solidFill>
-                  <a:srgbClr val="663399"/>
-                </a:solidFill>
-                <a:latin typeface="Consolas"/>
-              </a:rPr>
-              <a:t>U-Boot</a:t>
-            </a:r>
-          </a:p>
-        </p:txBody>
-      </p:sp>
-      <p:sp>
-        <p:nvSpPr>
-          <p:cNvPr id="11" name="TextBox 10"/>
-          <p:cNvSpPr txBox="1"/>
-          <p:nvPr/>
-        </p:nvSpPr>
-        <p:spPr>
-          <a:xfrm>
-            <a:off x="4682871" y="2788920"/>
-            <a:ext cx="1388745" cy="320040"/>
-          </a:xfrm>
-          <a:prstGeom prst="rect">
-            <a:avLst/>
-          </a:prstGeom>
-          <a:noFill/>
-        </p:spPr>
-        <p:txBody>
-          <a:bodyPr wrap="square" anchor="t" lIns="45720" rIns="45720">
-            <a:spAutoFit/>
-          </a:bodyPr>
-          <a:lstStyle/>
-          <a:p>
-            <a:pPr algn="ctr"/>
-            <a:r>
-              <a:rPr sz="900" b="0" i="0">
-                <a:solidFill>
-                  <a:srgbClr val="666666"/>
-                </a:solidFill>
-                <a:latin typeface="Calibri"/>
-              </a:rPr>
-              <a:t>Stage 2</a:t>
-            </a:r>
-          </a:p>
-        </p:txBody>
-      </p:sp>
-      <p:sp>
-        <p:nvSpPr>
-          <p:cNvPr id="12" name="Rounded Rectangle 11"/>
-          <p:cNvSpPr/>
-          <p:nvPr/>
-        </p:nvSpPr>
-        <p:spPr>
-          <a:xfrm>
-            <a:off x="6117336" y="2103120"/>
-            <a:ext cx="1388745" cy="640080"/>
-          </a:xfrm>
-          <a:prstGeom prst="roundRect">
-            <a:avLst/>
-          </a:prstGeom>
-          <a:solidFill>
-            <a:srgbClr val="E9D8F0"/>
-          </a:solidFill>
-          <a:ln w="6350">
-            <a:solidFill>
-              <a:srgbClr val="CC0066"/>
-            </a:solidFill>
-          </a:ln>
-          <a:effectLst/>
-        </p:spPr>
-        <p:style>
-          <a:lnRef idx="1">
-            <a:schemeClr val="accent1"/>
-          </a:lnRef>
-          <a:fillRef idx="3">
-            <a:schemeClr val="accent1"/>
-          </a:fillRef>
-          <a:effectRef idx="2">
-            <a:schemeClr val="accent1"/>
-          </a:effectRef>
-          <a:fontRef idx="minor">
-            <a:schemeClr val="lt1"/>
-          </a:fontRef>
-        </p:style>
-        <p:txBody>
-          <a:bodyPr rtlCol="0" anchor="ctr" lIns="18288" rIns="18288"/>
-          <a:lstStyle/>
-          <a:p>
-            <a:pPr algn="ctr"/>
-            <a:r>
-              <a:rPr sz="1100" b="1">
-                <a:solidFill>
-                  <a:srgbClr val="663399"/>
-                </a:solidFill>
-                <a:latin typeface="Consolas"/>
-              </a:rPr>
-              <a:t>Kernel</a:t>
-            </a:r>
-          </a:p>
-        </p:txBody>
-      </p:sp>
-      <p:sp>
-        <p:nvSpPr>
-          <p:cNvPr id="13" name="TextBox 12"/>
-          <p:cNvSpPr txBox="1"/>
-          <p:nvPr/>
-        </p:nvSpPr>
-        <p:spPr>
-          <a:xfrm>
-            <a:off x="6117336" y="2788920"/>
-            <a:ext cx="1388745" cy="320040"/>
-          </a:xfrm>
-          <a:prstGeom prst="rect">
-            <a:avLst/>
-          </a:prstGeom>
-          <a:noFill/>
-        </p:spPr>
-        <p:txBody>
-          <a:bodyPr wrap="square" anchor="t" lIns="45720" rIns="45720">
-            <a:spAutoFit/>
-          </a:bodyPr>
-          <a:lstStyle/>
-          <a:p>
-            <a:pPr algn="ctr"/>
-            <a:r>
-              <a:rPr sz="900" b="0" i="0">
-                <a:solidFill>
-                  <a:srgbClr val="666666"/>
-                </a:solidFill>
-                <a:latin typeface="Calibri"/>
-              </a:rPr>
-              <a:t>Init HW</a:t>
-            </a:r>
-          </a:p>
-        </p:txBody>
-      </p:sp>
-      <p:sp>
-        <p:nvSpPr>
-          <p:cNvPr id="14" name="Rounded Rectangle 13"/>
-          <p:cNvSpPr/>
-          <p:nvPr/>
-        </p:nvSpPr>
-        <p:spPr>
-          <a:xfrm>
-            <a:off x="7551800" y="2103120"/>
-            <a:ext cx="1388745" cy="640080"/>
-          </a:xfrm>
-          <a:prstGeom prst="roundRect">
-            <a:avLst/>
-          </a:prstGeom>
-          <a:solidFill>
-            <a:srgbClr val="E9D8F0"/>
-          </a:solidFill>
-          <a:ln w="6350">
-            <a:solidFill>
-              <a:srgbClr val="CC0066"/>
-            </a:solidFill>
-          </a:ln>
-          <a:effectLst/>
-        </p:spPr>
-        <p:style>
-          <a:lnRef idx="1">
-            <a:schemeClr val="accent1"/>
-          </a:lnRef>
-          <a:fillRef idx="3">
-            <a:schemeClr val="accent1"/>
-          </a:fillRef>
-          <a:effectRef idx="2">
-            <a:schemeClr val="accent1"/>
-          </a:effectRef>
-          <a:fontRef idx="minor">
-            <a:schemeClr val="lt1"/>
-          </a:fontRef>
-        </p:style>
-        <p:txBody>
-          <a:bodyPr rtlCol="0" anchor="ctr" lIns="18288" rIns="18288"/>
-          <a:lstStyle/>
-          <a:p>
-            <a:pPr algn="ctr"/>
-            <a:r>
-              <a:rPr sz="1100" b="1">
-                <a:solidFill>
-                  <a:srgbClr val="663399"/>
-                </a:solidFill>
-                <a:latin typeface="Consolas"/>
-              </a:rPr>
-              <a:t>initramfs</a:t>
-            </a:r>
-          </a:p>
-        </p:txBody>
-      </p:sp>
-      <p:sp>
-        <p:nvSpPr>
-          <p:cNvPr id="15" name="TextBox 14"/>
-          <p:cNvSpPr txBox="1"/>
-          <p:nvPr/>
-        </p:nvSpPr>
-        <p:spPr>
-          <a:xfrm>
-            <a:off x="7551800" y="2788920"/>
-            <a:ext cx="1388745" cy="320040"/>
-          </a:xfrm>
-          <a:prstGeom prst="rect">
-            <a:avLst/>
-          </a:prstGeom>
-          <a:noFill/>
-        </p:spPr>
-        <p:txBody>
-          <a:bodyPr wrap="square" anchor="t" lIns="45720" rIns="45720">
-            <a:spAutoFit/>
-          </a:bodyPr>
-          <a:lstStyle/>
-          <a:p>
-            <a:pPr algn="ctr"/>
-            <a:r>
-              <a:rPr sz="900" b="0" i="0">
-                <a:solidFill>
-                  <a:srgbClr val="666666"/>
-                </a:solidFill>
-                <a:latin typeface="Calibri"/>
-              </a:rPr>
-              <a:t>Mount /</a:t>
-            </a:r>
-          </a:p>
-        </p:txBody>
-      </p:sp>
-      <p:sp>
-        <p:nvSpPr>
-          <p:cNvPr id="16" name="Rounded Rectangle 15"/>
-          <p:cNvSpPr/>
-          <p:nvPr/>
-        </p:nvSpPr>
-        <p:spPr>
-          <a:xfrm>
-            <a:off x="8986266" y="2103120"/>
-            <a:ext cx="1388745" cy="640080"/>
-          </a:xfrm>
-          <a:prstGeom prst="roundRect">
-            <a:avLst/>
-          </a:prstGeom>
-          <a:solidFill>
-            <a:srgbClr val="E9D8F0"/>
-          </a:solidFill>
-          <a:ln w="6350">
-            <a:solidFill>
-              <a:srgbClr val="CC0066"/>
-            </a:solidFill>
-          </a:ln>
-          <a:effectLst/>
-        </p:spPr>
-        <p:style>
-          <a:lnRef idx="1">
-            <a:schemeClr val="accent1"/>
-          </a:lnRef>
-          <a:fillRef idx="3">
-            <a:schemeClr val="accent1"/>
-          </a:fillRef>
-          <a:effectRef idx="2">
-            <a:schemeClr val="accent1"/>
-          </a:effectRef>
-          <a:fontRef idx="minor">
-            <a:schemeClr val="lt1"/>
-          </a:fontRef>
-        </p:style>
-        <p:txBody>
-          <a:bodyPr rtlCol="0" anchor="ctr" lIns="18288" rIns="18288"/>
-          <a:lstStyle/>
-          <a:p>
-            <a:pPr algn="ctr"/>
-            <a:r>
-              <a:rPr sz="1100" b="1">
-                <a:solidFill>
-                  <a:srgbClr val="663399"/>
-                </a:solidFill>
-                <a:latin typeface="Consolas"/>
-              </a:rPr>
-              <a:t>systemd</a:t>
-            </a:r>
-          </a:p>
-        </p:txBody>
-      </p:sp>
-      <p:sp>
-        <p:nvSpPr>
-          <p:cNvPr id="17" name="TextBox 16"/>
-          <p:cNvSpPr txBox="1"/>
-          <p:nvPr/>
-        </p:nvSpPr>
-        <p:spPr>
-          <a:xfrm>
-            <a:off x="8986266" y="2788920"/>
-            <a:ext cx="1388745" cy="320040"/>
-          </a:xfrm>
-          <a:prstGeom prst="rect">
-            <a:avLst/>
-          </a:prstGeom>
-          <a:noFill/>
-        </p:spPr>
-        <p:txBody>
-          <a:bodyPr wrap="square" anchor="t" lIns="45720" rIns="45720">
-            <a:spAutoFit/>
-          </a:bodyPr>
-          <a:lstStyle/>
-          <a:p>
-            <a:pPr algn="ctr"/>
-            <a:r>
-              <a:rPr sz="900" b="0" i="0">
-                <a:solidFill>
-                  <a:srgbClr val="666666"/>
-                </a:solidFill>
-                <a:latin typeface="Calibri"/>
-              </a:rPr>
-              <a:t>Services</a:t>
-            </a:r>
-          </a:p>
-        </p:txBody>
-      </p:sp>
-      <p:sp>
-        <p:nvSpPr>
-          <p:cNvPr id="18" name="Rounded Rectangle 17"/>
-          <p:cNvSpPr/>
-          <p:nvPr/>
-        </p:nvSpPr>
-        <p:spPr>
-          <a:xfrm>
-            <a:off x="10420731" y="2103120"/>
-            <a:ext cx="1388745" cy="640080"/>
-          </a:xfrm>
-          <a:prstGeom prst="roundRect">
-            <a:avLst/>
-          </a:prstGeom>
-          <a:solidFill>
-            <a:srgbClr val="E9D8F0"/>
-          </a:solidFill>
-          <a:ln w="6350">
-            <a:solidFill>
-              <a:srgbClr val="CC0066"/>
-            </a:solidFill>
-          </a:ln>
-          <a:effectLst/>
-        </p:spPr>
-        <p:style>
-          <a:lnRef idx="1">
-            <a:schemeClr val="accent1"/>
-          </a:lnRef>
-          <a:fillRef idx="3">
-            <a:schemeClr val="accent1"/>
-          </a:fillRef>
-          <a:effectRef idx="2">
-            <a:schemeClr val="accent1"/>
-          </a:effectRef>
-          <a:fontRef idx="minor">
-            <a:schemeClr val="lt1"/>
-          </a:fontRef>
-        </p:style>
-        <p:txBody>
-          <a:bodyPr rtlCol="0" anchor="ctr" lIns="18288" rIns="18288"/>
-          <a:lstStyle/>
-          <a:p>
-            <a:pPr algn="ctr"/>
-            <a:r>
-              <a:rPr sz="1100" b="1">
-                <a:solidFill>
-                  <a:srgbClr val="663399"/>
-                </a:solidFill>
-                <a:latin typeface="Consolas"/>
-              </a:rPr>
-              <a:t>login</a:t>
-            </a:r>
-          </a:p>
-        </p:txBody>
-      </p:sp>
-      <p:sp>
-        <p:nvSpPr>
-          <p:cNvPr id="19" name="TextBox 18"/>
-          <p:cNvSpPr txBox="1"/>
-          <p:nvPr/>
-        </p:nvSpPr>
-        <p:spPr>
-          <a:xfrm>
-            <a:off x="10420731" y="2788920"/>
-            <a:ext cx="1388745" cy="320040"/>
-          </a:xfrm>
-          <a:prstGeom prst="rect">
-            <a:avLst/>
-          </a:prstGeom>
-          <a:noFill/>
-        </p:spPr>
-        <p:txBody>
-          <a:bodyPr wrap="square" anchor="t" lIns="45720" rIns="45720">
-            <a:spAutoFit/>
-          </a:bodyPr>
-          <a:lstStyle/>
-          <a:p>
-            <a:pPr algn="ctr"/>
-            <a:r>
-              <a:rPr sz="900" b="0" i="0">
-                <a:solidFill>
-                  <a:srgbClr val="666666"/>
-                </a:solidFill>
-                <a:latin typeface="Calibri"/>
-              </a:rPr>
-              <a:t>Ready</a:t>
-            </a:r>
-          </a:p>
-        </p:txBody>
-      </p:sp>
-      <p:sp>
-        <p:nvSpPr>
-          <p:cNvPr id="20" name="TextBox 19"/>
-          <p:cNvSpPr txBox="1"/>
-          <p:nvPr/>
-        </p:nvSpPr>
-        <p:spPr>
-          <a:xfrm>
-            <a:off x="822960" y="3657600"/>
-            <a:ext cx="10515600" cy="2377440"/>
-          </a:xfrm>
-          <a:prstGeom prst="rect">
-            <a:avLst/>
-          </a:prstGeom>
-          <a:noFill/>
-        </p:spPr>
-        <p:txBody>
-          <a:bodyPr wrap="square" lIns="45720" rIns="45720">
-            <a:spAutoFit/>
-          </a:bodyPr>
-          <a:lstStyle/>
-          <a:p>
-            <a:pPr>
-              <a:spcAft>
-                <a:spcPts val="600"/>
-              </a:spcAft>
-            </a:pPr>
-            <a:r>
-              <a:rPr sz="1500" b="1" i="0">
-                <a:solidFill>
-                  <a:srgbClr val="CC0066"/>
-                </a:solidFill>
-                <a:latin typeface="Calibri"/>
-              </a:rPr>
-              <a:t>Stages to remember</a:t>
-            </a:r>
-          </a:p>
-          <a:p>
-            <a:pPr>
-              <a:spcAft>
-                <a:spcPts val="400"/>
-              </a:spcAft>
-            </a:pPr>
-            <a:r>
-              <a:rPr sz="1200" b="0" i="0">
-                <a:solidFill>
-                  <a:srgbClr val="333333"/>
-                </a:solidFill>
-                <a:latin typeface="Calibri"/>
-              </a:rPr>
-              <a:t>• Vendor ROM (BootROM): vendor's first-stage; usually unmodifiable</a:t>
-            </a:r>
-          </a:p>
-          <a:p>
-            <a:pPr>
-              <a:spcAft>
-                <a:spcPts val="400"/>
-              </a:spcAft>
-            </a:pPr>
-            <a:r>
-              <a:rPr sz="1200" b="0" i="0">
-                <a:solidFill>
-                  <a:srgbClr val="333333"/>
-                </a:solidFill>
-                <a:latin typeface="Calibri"/>
-              </a:rPr>
-              <a:t>• SPL: minimal loader that brings up DRAM and loads U-Boot</a:t>
-            </a:r>
-          </a:p>
-          <a:p>
-            <a:pPr>
-              <a:spcAft>
-                <a:spcPts val="400"/>
-              </a:spcAft>
-            </a:pPr>
-            <a:r>
-              <a:rPr sz="1200" b="0" i="0">
-                <a:solidFill>
-                  <a:srgbClr val="333333"/>
-                </a:solidFill>
-                <a:latin typeface="Calibri"/>
-              </a:rPr>
-              <a:t>• U-Boot: loads kernel + DTB + initramfs; passes bootargs</a:t>
-            </a:r>
-          </a:p>
-          <a:p>
-            <a:pPr>
-              <a:spcAft>
-                <a:spcPts val="400"/>
-              </a:spcAft>
-            </a:pPr>
-            <a:r>
-              <a:rPr sz="1200" b="0" i="0">
-                <a:solidFill>
-                  <a:srgbClr val="333333"/>
-                </a:solidFill>
-                <a:latin typeface="Calibri"/>
-              </a:rPr>
-              <a:t>• Kernel: initializes hardware, mounts root filesystem</a:t>
-            </a:r>
-          </a:p>
-          <a:p>
-            <a:pPr>
-              <a:spcAft>
-                <a:spcPts val="800"/>
-              </a:spcAft>
-            </a:pPr>
-            <a:r>
-              <a:rPr sz="1200" b="0" i="0">
-                <a:solidFill>
-                  <a:srgbClr val="333333"/>
-                </a:solidFill>
-                <a:latin typeface="Calibri"/>
-              </a:rPr>
-              <a:t>• systemd: starts services per unit dependencies</a:t>
-            </a:r>
-          </a:p>
-          <a:p>
-            <a:pPr>
-              <a:spcAft>
-                <a:spcPts val="400"/>
-              </a:spcAft>
-            </a:pPr>
-            <a:r>
-              <a:rPr sz="1300" b="1" i="0">
-                <a:solidFill>
-                  <a:srgbClr val="663399"/>
-                </a:solidFill>
-                <a:latin typeface="Calibri"/>
-              </a:rPr>
-              <a:t>If boot fails, identify which stage. The fix lives in that stage.</a:t>
             </a:r>
           </a:p>
         </p:txBody>

--- a/yocto_training_all_session_decks/session_decks/D4S2_Boot_Flash_Verify.pptx
+++ b/yocto_training_all_session_decks/session_decks/D4S2_Boot_Flash_Verify.pptx
@@ -2929,7 +2929,7 @@
           <a:p>
             <a:fld id="{0CEC647C-F50C-4F78-AA33-D7AA6CDA18EE}" type="datetimeFigureOut">
               <a:rPr lang="en-US" smtClean="0"/>
-              <a:t>6/11/2026</a:t>
+              <a:t>6/12/2026</a:t>
             </a:fld>
             <a:endParaRPr lang="en-US"/>
           </a:p>
@@ -3094,7 +3094,7 @@
           <a:p>
             <a:fld id="{3A83341F-E62C-483B-84B4-966F8BE46097}" type="datetimeFigureOut">
               <a:rPr lang="en-US" smtClean="0"/>
-              <a:t>6/11/2026</a:t>
+              <a:t>6/12/2026</a:t>
             </a:fld>
             <a:endParaRPr lang="en-US"/>
           </a:p>
@@ -5299,10 +5299,7 @@
           <a:lstStyle/>
           <a:p>
             <a:r>
-              <a:rPr sz="3200" b="1">
-                <a:solidFill>
-                  <a:srgbClr val="CC0066"/>
-                </a:solidFill>
+              <a:rPr sz="3200" b="1" dirty="0">
                 <a:latin typeface="Calibri"/>
               </a:rPr>
               <a:t>Session Agenda</a:t>
@@ -5454,10 +5451,7 @@
           <a:lstStyle/>
           <a:p>
             <a:r>
-              <a:rPr sz="3200" b="1">
-                <a:solidFill>
-                  <a:srgbClr val="CC0066"/>
-                </a:solidFill>
+              <a:rPr sz="3200" b="1" dirty="0">
                 <a:latin typeface="Calibri"/>
               </a:rPr>
               <a:t>Boot Flow on a Real Device</a:t>
@@ -6229,7 +6223,7 @@
         <p:spPr>
           <a:xfrm>
             <a:off x="822960" y="3657600"/>
-            <a:ext cx="10515600" cy="2377440"/>
+            <a:ext cx="10515600" cy="2231380"/>
           </a:xfrm>
           <a:prstGeom prst="rect">
             <a:avLst/>
@@ -6248,7 +6242,7 @@
               </a:spcAft>
             </a:pPr>
             <a:r>
-              <a:rPr sz="1500" b="1" i="0">
+              <a:rPr b="1" i="0" dirty="0">
                 <a:solidFill>
                   <a:srgbClr val="CC0066"/>
                 </a:solidFill>
@@ -6264,13 +6258,31 @@
               </a:spcAft>
             </a:pPr>
             <a:r>
-              <a:rPr sz="1200" b="0" i="0">
+              <a:rPr sz="1600" b="0" i="0" dirty="0">
                 <a:solidFill>
                   <a:srgbClr val="333333"/>
                 </a:solidFill>
                 <a:latin typeface="Calibri"/>
               </a:rPr>
-              <a:t>• Vendor ROM (BootROM): vendor's first-stage; usually unmodifiable</a:t>
+              <a:t>• Vendor ROM (</a:t>
+            </a:r>
+            <a:r>
+              <a:rPr sz="1600" b="0" i="0" dirty="0" err="1">
+                <a:solidFill>
+                  <a:srgbClr val="333333"/>
+                </a:solidFill>
+                <a:latin typeface="Calibri"/>
+              </a:rPr>
+              <a:t>BootROM</a:t>
+            </a:r>
+            <a:r>
+              <a:rPr sz="1600" b="0" i="0" dirty="0">
+                <a:solidFill>
+                  <a:srgbClr val="333333"/>
+                </a:solidFill>
+                <a:latin typeface="Calibri"/>
+              </a:rPr>
+              <a:t>): vendor's first-stage; usually unmodifiable</a:t>
             </a:r>
           </a:p>
           <a:p>
@@ -6280,7 +6292,7 @@
               </a:spcAft>
             </a:pPr>
             <a:r>
-              <a:rPr sz="1200" b="0" i="0">
+              <a:rPr sz="1600" b="0" i="0" dirty="0">
                 <a:solidFill>
                   <a:srgbClr val="333333"/>
                 </a:solidFill>
@@ -6296,14 +6308,47 @@
               </a:spcAft>
             </a:pPr>
             <a:r>
-              <a:rPr sz="1200" b="0" i="0">
+              <a:rPr sz="1600" b="0" i="0" dirty="0">
                 <a:solidFill>
                   <a:srgbClr val="333333"/>
                 </a:solidFill>
                 <a:latin typeface="Calibri"/>
               </a:rPr>
-              <a:t>• U-Boot: loads kernel + DTB + initramfs; passes bootargs</a:t>
-            </a:r>
+              <a:t>• U-Boot: loads kernel + DTB + </a:t>
+            </a:r>
+            <a:r>
+              <a:rPr sz="1600" b="0" i="0" dirty="0" err="1">
+                <a:solidFill>
+                  <a:srgbClr val="333333"/>
+                </a:solidFill>
+                <a:latin typeface="Calibri"/>
+              </a:rPr>
+              <a:t>initramfs</a:t>
+            </a:r>
+            <a:r>
+              <a:rPr sz="1600" b="0" i="0" dirty="0">
+                <a:solidFill>
+                  <a:srgbClr val="333333"/>
+                </a:solidFill>
+                <a:latin typeface="Calibri"/>
+              </a:rPr>
+              <a:t>; passes </a:t>
+            </a:r>
+            <a:r>
+              <a:rPr sz="1600" b="0" i="0" dirty="0" err="1">
+                <a:solidFill>
+                  <a:srgbClr val="333333"/>
+                </a:solidFill>
+                <a:latin typeface="Calibri"/>
+              </a:rPr>
+              <a:t>bootargs</a:t>
+            </a:r>
+            <a:endParaRPr sz="1600" b="0" i="0" dirty="0">
+              <a:solidFill>
+                <a:srgbClr val="333333"/>
+              </a:solidFill>
+              <a:latin typeface="Calibri"/>
+            </a:endParaRPr>
           </a:p>
           <a:p>
             <a:pPr>
@@ -6312,7 +6357,7 @@
               </a:spcAft>
             </a:pPr>
             <a:r>
-              <a:rPr sz="1200" b="0" i="0">
+              <a:rPr sz="1600" b="0" i="0" dirty="0">
                 <a:solidFill>
                   <a:srgbClr val="333333"/>
                 </a:solidFill>
@@ -6328,13 +6373,31 @@
               </a:spcAft>
             </a:pPr>
             <a:r>
-              <a:rPr sz="1200" b="0" i="0">
+              <a:rPr sz="1600" b="0" i="0" dirty="0">
                 <a:solidFill>
                   <a:srgbClr val="333333"/>
                 </a:solidFill>
                 <a:latin typeface="Calibri"/>
               </a:rPr>
-              <a:t>• systemd: starts services per unit dependencies</a:t>
+              <a:t>• </a:t>
+            </a:r>
+            <a:r>
+              <a:rPr sz="1600" b="0" i="0" dirty="0" err="1">
+                <a:solidFill>
+                  <a:srgbClr val="333333"/>
+                </a:solidFill>
+                <a:latin typeface="Calibri"/>
+              </a:rPr>
+              <a:t>systemd</a:t>
+            </a:r>
+            <a:r>
+              <a:rPr sz="1600" b="0" i="0" dirty="0">
+                <a:solidFill>
+                  <a:srgbClr val="333333"/>
+                </a:solidFill>
+                <a:latin typeface="Calibri"/>
+              </a:rPr>
+              <a:t>: starts services per unit dependencies</a:t>
             </a:r>
           </a:p>
           <a:p>
@@ -6344,7 +6407,7 @@
               </a:spcAft>
             </a:pPr>
             <a:r>
-              <a:rPr sz="1300" b="1" i="0">
+              <a:rPr sz="1600" b="1" i="0" dirty="0">
                 <a:solidFill>
                   <a:srgbClr val="663399"/>
                 </a:solidFill>
@@ -6396,10 +6459,7 @@
           <a:lstStyle/>
           <a:p>
             <a:r>
-              <a:rPr sz="3200" b="1">
-                <a:solidFill>
-                  <a:srgbClr val="CC0066"/>
-                </a:solidFill>
+              <a:rPr sz="3200" b="1" dirty="0">
                 <a:latin typeface="Calibri"/>
               </a:rPr>
               <a:t>Flashing Methods</a:t>
@@ -6562,7 +6622,7 @@
         <p:spPr>
           <a:xfrm>
             <a:off x="731519" y="2514600"/>
-            <a:ext cx="3337560" cy="3474720"/>
+            <a:ext cx="3337560" cy="3036729"/>
           </a:xfrm>
           <a:prstGeom prst="rect">
             <a:avLst/>
@@ -6581,7 +6641,7 @@
               </a:spcAft>
             </a:pPr>
             <a:r>
-              <a:rPr sz="1200" b="1" i="0">
+              <a:rPr sz="1600" b="1" i="0">
                 <a:solidFill>
                   <a:srgbClr val="CC0066"/>
                 </a:solidFill>
@@ -6597,7 +6657,7 @@
               </a:spcAft>
             </a:pPr>
             <a:r>
-              <a:rPr sz="1100" b="0" i="0">
+              <a:rPr sz="1400" b="0" i="0">
                 <a:solidFill>
                   <a:srgbClr val="333333"/>
                 </a:solidFill>
@@ -6613,7 +6673,7 @@
               </a:spcAft>
             </a:pPr>
             <a:r>
-              <a:rPr sz="1100" b="0" i="0">
+              <a:rPr sz="1400" b="0" i="0">
                 <a:solidFill>
                   <a:srgbClr val="333333"/>
                 </a:solidFill>
@@ -6628,7 +6688,7 @@
                 <a:spcPts val="400"/>
               </a:spcAft>
             </a:pPr>
-            <a:endParaRPr sz="1100" b="0" i="0">
+            <a:endParaRPr sz="1400" b="0" i="0">
               <a:solidFill>
                 <a:srgbClr val="333333"/>
               </a:solidFill>
@@ -6642,7 +6702,7 @@
               </a:spcAft>
             </a:pPr>
             <a:r>
-              <a:rPr sz="1100" b="0" i="0">
+              <a:rPr sz="1400" b="0" i="0">
                 <a:solidFill>
                   <a:srgbClr val="333333"/>
                 </a:solidFill>
@@ -6657,7 +6717,7 @@
                 <a:spcPts val="400"/>
               </a:spcAft>
             </a:pPr>
-            <a:endParaRPr sz="1100" b="0" i="0">
+            <a:endParaRPr sz="1400" b="0" i="0">
               <a:solidFill>
                 <a:srgbClr val="333333"/>
               </a:solidFill>
@@ -6671,7 +6731,7 @@
               </a:spcAft>
             </a:pPr>
             <a:r>
-              <a:rPr sz="1200" b="1" i="0">
+              <a:rPr sz="1600" b="1" i="0">
                 <a:solidFill>
                   <a:srgbClr val="CC0066"/>
                 </a:solidFill>
@@ -6687,7 +6747,7 @@
               </a:spcAft>
             </a:pPr>
             <a:r>
-              <a:rPr sz="1100" b="0" i="0">
+              <a:rPr sz="1400" b="0" i="0">
                 <a:solidFill>
                   <a:srgbClr val="333333"/>
                 </a:solidFill>
@@ -6703,7 +6763,7 @@
               </a:spcAft>
             </a:pPr>
             <a:r>
-              <a:rPr sz="1100" b="0" i="0">
+              <a:rPr sz="1400" b="0" i="0">
                 <a:solidFill>
                   <a:srgbClr val="333333"/>
                 </a:solidFill>
@@ -6718,7 +6778,7 @@
                 <a:spcPts val="400"/>
               </a:spcAft>
             </a:pPr>
-            <a:endParaRPr sz="1100" b="0" i="0">
+            <a:endParaRPr sz="1400" b="0" i="0">
               <a:solidFill>
                 <a:srgbClr val="333333"/>
               </a:solidFill>
@@ -6732,7 +6792,7 @@
               </a:spcAft>
             </a:pPr>
             <a:r>
-              <a:rPr sz="1100" b="0" i="0">
+              <a:rPr sz="1400" b="0" i="0">
                 <a:solidFill>
                   <a:srgbClr val="333333"/>
                 </a:solidFill>
@@ -6863,7 +6923,7 @@
         <p:spPr>
           <a:xfrm>
             <a:off x="4389120" y="2514600"/>
-            <a:ext cx="3337560" cy="3474720"/>
+            <a:ext cx="3337560" cy="3303468"/>
           </a:xfrm>
           <a:prstGeom prst="rect">
             <a:avLst/>
@@ -6882,7 +6942,7 @@
               </a:spcAft>
             </a:pPr>
             <a:r>
-              <a:rPr sz="1200" b="1" i="0">
+              <a:rPr sz="1600" b="1" i="0">
                 <a:solidFill>
                   <a:srgbClr val="663399"/>
                 </a:solidFill>
@@ -6898,7 +6958,7 @@
               </a:spcAft>
             </a:pPr>
             <a:r>
-              <a:rPr sz="1100" b="0" i="0">
+              <a:rPr sz="1400" b="0" i="0">
                 <a:solidFill>
                   <a:srgbClr val="333333"/>
                 </a:solidFill>
@@ -6913,7 +6973,7 @@
                 <a:spcPts val="400"/>
               </a:spcAft>
             </a:pPr>
-            <a:endParaRPr sz="1100" b="0" i="0">
+            <a:endParaRPr sz="1400" b="0" i="0">
               <a:solidFill>
                 <a:srgbClr val="333333"/>
               </a:solidFill>
@@ -6927,7 +6987,7 @@
               </a:spcAft>
             </a:pPr>
             <a:r>
-              <a:rPr sz="1100" b="0" i="0">
+              <a:rPr sz="1400" b="0" i="0">
                 <a:solidFill>
                   <a:srgbClr val="333333"/>
                 </a:solidFill>
@@ -6943,7 +7003,7 @@
               </a:spcAft>
             </a:pPr>
             <a:r>
-              <a:rPr sz="1100" b="0" i="0">
+              <a:rPr sz="1400" b="0" i="0">
                 <a:solidFill>
                   <a:srgbClr val="333333"/>
                 </a:solidFill>
@@ -6958,7 +7018,7 @@
                 <a:spcPts val="400"/>
               </a:spcAft>
             </a:pPr>
-            <a:endParaRPr sz="1100" b="0" i="0">
+            <a:endParaRPr sz="1400" b="0" i="0">
               <a:solidFill>
                 <a:srgbClr val="333333"/>
               </a:solidFill>
@@ -6972,7 +7032,7 @@
               </a:spcAft>
             </a:pPr>
             <a:r>
-              <a:rPr sz="1200" b="1" i="0">
+              <a:rPr sz="1600" b="1" i="0">
                 <a:solidFill>
                   <a:srgbClr val="663399"/>
                 </a:solidFill>
@@ -6988,7 +7048,7 @@
               </a:spcAft>
             </a:pPr>
             <a:r>
-              <a:rPr sz="1100" b="0" i="0">
+              <a:rPr sz="1400" b="0" i="0">
                 <a:solidFill>
                   <a:srgbClr val="333333"/>
                 </a:solidFill>
@@ -7004,7 +7064,7 @@
               </a:spcAft>
             </a:pPr>
             <a:r>
-              <a:rPr sz="1100" b="0" i="0">
+              <a:rPr sz="1400" b="0" i="0">
                 <a:solidFill>
                   <a:srgbClr val="333333"/>
                 </a:solidFill>
@@ -7020,7 +7080,7 @@
               </a:spcAft>
             </a:pPr>
             <a:r>
-              <a:rPr sz="1100" b="0" i="0">
+              <a:rPr sz="1400" b="0" i="0">
                 <a:solidFill>
                   <a:srgbClr val="333333"/>
                 </a:solidFill>
@@ -7035,7 +7095,7 @@
                 <a:spcPts val="400"/>
               </a:spcAft>
             </a:pPr>
-            <a:endParaRPr sz="1100" b="0" i="0">
+            <a:endParaRPr sz="1400" b="0" i="0">
               <a:solidFill>
                 <a:srgbClr val="333333"/>
               </a:solidFill>
@@ -7049,7 +7109,7 @@
               </a:spcAft>
             </a:pPr>
             <a:r>
-              <a:rPr sz="1100" b="0" i="0">
+              <a:rPr sz="1400" b="0" i="0">
                 <a:solidFill>
                   <a:srgbClr val="333333"/>
                 </a:solidFill>
@@ -7180,7 +7240,7 @@
         <p:spPr>
           <a:xfrm>
             <a:off x="8046719" y="2514600"/>
-            <a:ext cx="3337560" cy="3474720"/>
+            <a:ext cx="3337560" cy="3036729"/>
           </a:xfrm>
           <a:prstGeom prst="rect">
             <a:avLst/>
@@ -7199,7 +7259,7 @@
               </a:spcAft>
             </a:pPr>
             <a:r>
-              <a:rPr sz="1200" b="1" i="0">
+              <a:rPr sz="1600" b="1" i="0">
                 <a:solidFill>
                   <a:srgbClr val="CC0066"/>
                 </a:solidFill>
@@ -7215,7 +7275,7 @@
               </a:spcAft>
             </a:pPr>
             <a:r>
-              <a:rPr sz="1100" b="0" i="0">
+              <a:rPr sz="1400" b="0" i="0">
                 <a:solidFill>
                   <a:srgbClr val="333333"/>
                 </a:solidFill>
@@ -7231,7 +7291,7 @@
               </a:spcAft>
             </a:pPr>
             <a:r>
-              <a:rPr sz="1100" b="0" i="0">
+              <a:rPr sz="1400" b="0" i="0">
                 <a:solidFill>
                   <a:srgbClr val="333333"/>
                 </a:solidFill>
@@ -7246,7 +7306,7 @@
                 <a:spcPts val="400"/>
               </a:spcAft>
             </a:pPr>
-            <a:endParaRPr sz="1100" b="0" i="0">
+            <a:endParaRPr sz="1400" b="0" i="0">
               <a:solidFill>
                 <a:srgbClr val="333333"/>
               </a:solidFill>
@@ -7260,7 +7320,7 @@
               </a:spcAft>
             </a:pPr>
             <a:r>
-              <a:rPr sz="1200" b="1" i="0">
+              <a:rPr sz="1600" b="1" i="0">
                 <a:solidFill>
                   <a:srgbClr val="CC0066"/>
                 </a:solidFill>
@@ -7276,7 +7336,7 @@
               </a:spcAft>
             </a:pPr>
             <a:r>
-              <a:rPr sz="1100" b="0" i="0">
+              <a:rPr sz="1400" b="0" i="0">
                 <a:solidFill>
                   <a:srgbClr val="333333"/>
                 </a:solidFill>
@@ -7292,7 +7352,7 @@
               </a:spcAft>
             </a:pPr>
             <a:r>
-              <a:rPr sz="1100" b="0" i="0">
+              <a:rPr sz="1400" b="0" i="0">
                 <a:solidFill>
                   <a:srgbClr val="333333"/>
                 </a:solidFill>
@@ -7308,7 +7368,7 @@
               </a:spcAft>
             </a:pPr>
             <a:r>
-              <a:rPr sz="1100" b="0" i="0">
+              <a:rPr sz="1400" b="0" i="0">
                 <a:solidFill>
                   <a:srgbClr val="333333"/>
                 </a:solidFill>
@@ -7324,7 +7384,7 @@
               </a:spcAft>
             </a:pPr>
             <a:r>
-              <a:rPr sz="1100" b="0" i="0">
+              <a:rPr sz="1400" b="0" i="0">
                 <a:solidFill>
                   <a:srgbClr val="333333"/>
                 </a:solidFill>
@@ -7339,7 +7399,7 @@
                 <a:spcPts val="400"/>
               </a:spcAft>
             </a:pPr>
-            <a:endParaRPr sz="1100" b="0" i="0">
+            <a:endParaRPr sz="1400" b="0" i="0">
               <a:solidFill>
                 <a:srgbClr val="333333"/>
               </a:solidFill>
@@ -7353,7 +7413,7 @@
               </a:spcAft>
             </a:pPr>
             <a:r>
-              <a:rPr sz="1100" b="0" i="0">
+              <a:rPr sz="1400" b="0" i="0">
                 <a:solidFill>
                   <a:srgbClr val="333333"/>
                 </a:solidFill>
@@ -7405,10 +7465,7 @@
           <a:lstStyle/>
           <a:p>
             <a:r>
-              <a:rPr sz="3200" b="1">
-                <a:solidFill>
-                  <a:srgbClr val="CC0066"/>
-                </a:solidFill>
+              <a:rPr sz="3200" b="1" dirty="0">
                 <a:latin typeface="Calibri"/>
               </a:rPr>
               <a:t>First-Boot Checklist</a:t>
@@ -7425,7 +7482,7 @@
         <p:spPr>
           <a:xfrm>
             <a:off x="822960" y="1417320"/>
-            <a:ext cx="10515600" cy="365760"/>
+            <a:ext cx="10515600" cy="338554"/>
           </a:xfrm>
           <a:prstGeom prst="rect">
             <a:avLst/>
@@ -7440,7 +7497,7 @@
           <a:p>
             <a:pPr algn="l"/>
             <a:r>
-              <a:rPr sz="1500" b="0" i="1">
+              <a:rPr sz="1600" b="0" i="1">
                 <a:solidFill>
                   <a:srgbClr val="666666"/>
                 </a:solidFill>
@@ -7551,8 +7608,8 @@
         </p:nvSpPr>
         <p:spPr>
           <a:xfrm>
-            <a:off x="1005840" y="1874519"/>
-            <a:ext cx="10241280" cy="4389120"/>
+            <a:off x="1197864" y="1714590"/>
+            <a:ext cx="10241280" cy="4708981"/>
           </a:xfrm>
           <a:prstGeom prst="rect">
             <a:avLst/>
@@ -7571,7 +7628,7 @@
               </a:spcAft>
             </a:pPr>
             <a:r>
-              <a:rPr sz="1100" i="1">
+              <a:rPr sz="1200" i="1">
                 <a:solidFill>
                   <a:srgbClr val="808080"/>
                 </a:solidFill>
@@ -7587,7 +7644,7 @@
               </a:spcAft>
             </a:pPr>
             <a:r>
-              <a:rPr sz="1100" i="1">
+              <a:rPr sz="1200" i="1">
                 <a:solidFill>
                   <a:srgbClr val="808080"/>
                 </a:solidFill>
@@ -7603,7 +7660,7 @@
               </a:spcAft>
             </a:pPr>
             <a:r>
-              <a:rPr sz="1100">
+              <a:rPr sz="1200">
                 <a:solidFill>
                   <a:srgbClr val="2D2D2D"/>
                 </a:solidFill>
@@ -7619,7 +7676,7 @@
               </a:spcAft>
             </a:pPr>
             <a:r>
-              <a:rPr sz="1100" i="1">
+              <a:rPr sz="1200" i="1">
                 <a:solidFill>
                   <a:srgbClr val="808080"/>
                 </a:solidFill>
@@ -7635,7 +7692,7 @@
               </a:spcAft>
             </a:pPr>
             <a:r>
-              <a:rPr sz="1100">
+              <a:rPr sz="1200">
                 <a:solidFill>
                   <a:srgbClr val="2D2D2D"/>
                 </a:solidFill>
@@ -7651,7 +7708,7 @@
               </a:spcAft>
             </a:pPr>
             <a:r>
-              <a:rPr sz="1100" i="1">
+              <a:rPr sz="1200" i="1">
                 <a:solidFill>
                   <a:srgbClr val="808080"/>
                 </a:solidFill>
@@ -7667,7 +7724,7 @@
               </a:spcAft>
             </a:pPr>
             <a:r>
-              <a:rPr sz="1100">
+              <a:rPr sz="1200">
                 <a:solidFill>
                   <a:srgbClr val="2D2D2D"/>
                 </a:solidFill>
@@ -7683,7 +7740,7 @@
               </a:spcAft>
             </a:pPr>
             <a:r>
-              <a:rPr sz="1100" i="1">
+              <a:rPr sz="1200" i="1">
                 <a:solidFill>
                   <a:srgbClr val="808080"/>
                 </a:solidFill>
@@ -7699,7 +7756,7 @@
               </a:spcAft>
             </a:pPr>
             <a:r>
-              <a:rPr sz="1100">
+              <a:rPr sz="1200">
                 <a:solidFill>
                   <a:srgbClr val="2D2D2D"/>
                 </a:solidFill>
@@ -7715,7 +7772,7 @@
               </a:spcAft>
             </a:pPr>
             <a:r>
-              <a:rPr sz="1100">
+              <a:rPr sz="1200">
                 <a:solidFill>
                   <a:srgbClr val="2D2D2D"/>
                 </a:solidFill>
@@ -7731,7 +7788,7 @@
               </a:spcAft>
             </a:pPr>
             <a:r>
-              <a:rPr sz="1100">
+              <a:rPr sz="1200">
                 <a:solidFill>
                   <a:srgbClr val="2D2D2D"/>
                 </a:solidFill>
@@ -7747,7 +7804,7 @@
               </a:spcAft>
             </a:pPr>
             <a:r>
-              <a:rPr sz="1100" i="1">
+              <a:rPr sz="1200" i="1">
                 <a:solidFill>
                   <a:srgbClr val="808080"/>
                 </a:solidFill>
@@ -7763,7 +7820,7 @@
               </a:spcAft>
             </a:pPr>
             <a:r>
-              <a:rPr sz="1100">
+              <a:rPr sz="1200">
                 <a:solidFill>
                   <a:srgbClr val="2D2D2D"/>
                 </a:solidFill>
@@ -7779,7 +7836,7 @@
               </a:spcAft>
             </a:pPr>
             <a:r>
-              <a:rPr sz="1100" i="1">
+              <a:rPr sz="1200" i="1">
                 <a:solidFill>
                   <a:srgbClr val="808080"/>
                 </a:solidFill>
@@ -7795,7 +7852,7 @@
               </a:spcAft>
             </a:pPr>
             <a:r>
-              <a:rPr sz="1100">
+              <a:rPr sz="1200">
                 <a:solidFill>
                   <a:srgbClr val="2D2D2D"/>
                 </a:solidFill>
@@ -7811,7 +7868,7 @@
               </a:spcAft>
             </a:pPr>
             <a:r>
-              <a:rPr sz="1100" i="1">
+              <a:rPr sz="1200" i="1">
                 <a:solidFill>
                   <a:srgbClr val="808080"/>
                 </a:solidFill>
@@ -7827,7 +7884,7 @@
               </a:spcAft>
             </a:pPr>
             <a:r>
-              <a:rPr sz="1100">
+              <a:rPr sz="1200">
                 <a:solidFill>
                   <a:srgbClr val="2D2D2D"/>
                 </a:solidFill>
@@ -7843,7 +7900,7 @@
               </a:spcAft>
             </a:pPr>
             <a:r>
-              <a:rPr sz="1100">
+              <a:rPr sz="1200">
                 <a:solidFill>
                   <a:srgbClr val="2D2D2D"/>
                 </a:solidFill>
@@ -7859,7 +7916,7 @@
               </a:spcAft>
             </a:pPr>
             <a:r>
-              <a:rPr sz="1100">
+              <a:rPr sz="1200">
                 <a:solidFill>
                   <a:srgbClr val="2D2D2D"/>
                 </a:solidFill>
@@ -7875,7 +7932,7 @@
               </a:spcAft>
             </a:pPr>
             <a:r>
-              <a:rPr sz="1100" i="1">
+              <a:rPr sz="1200" i="1">
                 <a:solidFill>
                   <a:srgbClr val="808080"/>
                 </a:solidFill>
@@ -7891,7 +7948,7 @@
               </a:spcAft>
             </a:pPr>
             <a:r>
-              <a:rPr sz="1100">
+              <a:rPr sz="1200">
                 <a:solidFill>
                   <a:srgbClr val="2D2D2D"/>
                 </a:solidFill>
@@ -7907,7 +7964,7 @@
               </a:spcAft>
             </a:pPr>
             <a:r>
-              <a:rPr sz="1100">
+              <a:rPr sz="1200">
                 <a:solidFill>
                   <a:srgbClr val="2D2D2D"/>
                 </a:solidFill>
@@ -7923,7 +7980,7 @@
               </a:spcAft>
             </a:pPr>
             <a:r>
-              <a:rPr sz="1100" i="1">
+              <a:rPr sz="1200" i="1">
                 <a:solidFill>
                   <a:srgbClr val="808080"/>
                 </a:solidFill>
@@ -7939,7 +7996,7 @@
               </a:spcAft>
             </a:pPr>
             <a:r>
-              <a:rPr sz="1100">
+              <a:rPr sz="1200">
                 <a:solidFill>
                   <a:srgbClr val="2D2D2D"/>
                 </a:solidFill>
@@ -7955,7 +8012,7 @@
               </a:spcAft>
             </a:pPr>
             <a:r>
-              <a:rPr sz="1100">
+              <a:rPr sz="1200">
                 <a:solidFill>
                   <a:srgbClr val="2D2D2D"/>
                 </a:solidFill>
@@ -8007,10 +8064,7 @@
           <a:lstStyle/>
           <a:p>
             <a:r>
-              <a:rPr sz="3200" b="1">
-                <a:solidFill>
-                  <a:srgbClr val="CC0066"/>
-                </a:solidFill>
+              <a:rPr sz="3200" b="1" dirty="0">
                 <a:latin typeface="Calibri"/>
               </a:rPr>
               <a:t>Common Bring-Up Failures</a:t>
@@ -8709,10 +8763,7 @@
           <a:lstStyle/>
           <a:p>
             <a:r>
-              <a:rPr sz="3200" b="1">
-                <a:solidFill>
-                  <a:srgbClr val="CC0066"/>
-                </a:solidFill>
+              <a:rPr sz="3200" b="1" dirty="0">
                 <a:latin typeface="Calibri"/>
               </a:rPr>
               <a:t>Validating a Clean Boot</a:t>
@@ -8855,8 +8906,8 @@
         </p:nvSpPr>
         <p:spPr>
           <a:xfrm>
-            <a:off x="1005840" y="1874519"/>
-            <a:ext cx="10241280" cy="4389120"/>
+            <a:off x="1271311" y="1783080"/>
+            <a:ext cx="10241280" cy="4693593"/>
           </a:xfrm>
           <a:prstGeom prst="rect">
             <a:avLst/>
@@ -8875,7 +8926,7 @@
               </a:spcAft>
             </a:pPr>
             <a:r>
-              <a:rPr sz="1100" i="1">
+              <a:rPr sz="1300" i="1">
                 <a:solidFill>
                   <a:srgbClr val="808080"/>
                 </a:solidFill>
@@ -8891,7 +8942,7 @@
               </a:spcAft>
             </a:pPr>
             <a:r>
-              <a:rPr sz="1100">
+              <a:rPr sz="1300">
                 <a:solidFill>
                   <a:srgbClr val="2D2D2D"/>
                 </a:solidFill>
@@ -8907,7 +8958,7 @@
               </a:spcAft>
             </a:pPr>
             <a:r>
-              <a:rPr sz="1100" i="1">
+              <a:rPr sz="1300" i="1">
                 <a:solidFill>
                   <a:srgbClr val="808080"/>
                 </a:solidFill>
@@ -8923,7 +8974,7 @@
               </a:spcAft>
             </a:pPr>
             <a:r>
-              <a:rPr sz="1100">
+              <a:rPr sz="1300">
                 <a:solidFill>
                   <a:srgbClr val="2D2D2D"/>
                 </a:solidFill>
@@ -8939,7 +8990,7 @@
               </a:spcAft>
             </a:pPr>
             <a:r>
-              <a:rPr sz="1100" i="1">
+              <a:rPr sz="1300" i="1">
                 <a:solidFill>
                   <a:srgbClr val="808080"/>
                 </a:solidFill>
@@ -8955,7 +9006,7 @@
               </a:spcAft>
             </a:pPr>
             <a:r>
-              <a:rPr sz="1100">
+              <a:rPr sz="1300">
                 <a:solidFill>
                   <a:srgbClr val="2D2D2D"/>
                 </a:solidFill>
@@ -8971,7 +9022,7 @@
               </a:spcAft>
             </a:pPr>
             <a:r>
-              <a:rPr sz="1100" i="1">
+              <a:rPr sz="1300" i="1">
                 <a:solidFill>
                   <a:srgbClr val="808080"/>
                 </a:solidFill>
@@ -8987,7 +9038,7 @@
               </a:spcAft>
             </a:pPr>
             <a:r>
-              <a:rPr sz="1100">
+              <a:rPr sz="1300">
                 <a:solidFill>
                   <a:srgbClr val="2D2D2D"/>
                 </a:solidFill>
@@ -9003,7 +9054,7 @@
               </a:spcAft>
             </a:pPr>
             <a:r>
-              <a:rPr sz="1100" i="1">
+              <a:rPr sz="1300" i="1">
                 <a:solidFill>
                   <a:srgbClr val="808080"/>
                 </a:solidFill>
@@ -9019,7 +9070,7 @@
               </a:spcAft>
             </a:pPr>
             <a:r>
-              <a:rPr sz="1100">
+              <a:rPr sz="1300">
                 <a:solidFill>
                   <a:srgbClr val="2D2D2D"/>
                 </a:solidFill>
@@ -9035,7 +9086,7 @@
               </a:spcAft>
             </a:pPr>
             <a:r>
-              <a:rPr sz="1100" i="1">
+              <a:rPr sz="1300" i="1">
                 <a:solidFill>
                   <a:srgbClr val="808080"/>
                 </a:solidFill>
@@ -9051,7 +9102,7 @@
               </a:spcAft>
             </a:pPr>
             <a:r>
-              <a:rPr sz="1100">
+              <a:rPr sz="1300">
                 <a:solidFill>
                   <a:srgbClr val="2D2D2D"/>
                 </a:solidFill>
@@ -9067,7 +9118,7 @@
               </a:spcAft>
             </a:pPr>
             <a:r>
-              <a:rPr sz="1100">
+              <a:rPr sz="1300">
                 <a:solidFill>
                   <a:srgbClr val="2D2D2D"/>
                 </a:solidFill>
@@ -9083,7 +9134,7 @@
               </a:spcAft>
             </a:pPr>
             <a:r>
-              <a:rPr sz="1100">
+              <a:rPr sz="1300">
                 <a:solidFill>
                   <a:srgbClr val="2D2D2D"/>
                 </a:solidFill>
@@ -9099,7 +9150,7 @@
               </a:spcAft>
             </a:pPr>
             <a:r>
-              <a:rPr sz="1100" i="1">
+              <a:rPr sz="1300" i="1">
                 <a:solidFill>
                   <a:srgbClr val="808080"/>
                 </a:solidFill>
@@ -9115,7 +9166,7 @@
               </a:spcAft>
             </a:pPr>
             <a:r>
-              <a:rPr sz="1100">
+              <a:rPr sz="1300">
                 <a:solidFill>
                   <a:srgbClr val="2D2D2D"/>
                 </a:solidFill>
@@ -9131,7 +9182,7 @@
               </a:spcAft>
             </a:pPr>
             <a:r>
-              <a:rPr sz="1100">
+              <a:rPr sz="1300">
                 <a:solidFill>
                   <a:srgbClr val="2D2D2D"/>
                 </a:solidFill>
@@ -9147,7 +9198,7 @@
               </a:spcAft>
             </a:pPr>
             <a:r>
-              <a:rPr sz="1100" i="1">
+              <a:rPr sz="1300" i="1">
                 <a:solidFill>
                   <a:srgbClr val="808080"/>
                 </a:solidFill>
@@ -9163,7 +9214,7 @@
               </a:spcAft>
             </a:pPr>
             <a:r>
-              <a:rPr sz="1100">
+              <a:rPr sz="1300">
                 <a:solidFill>
                   <a:srgbClr val="2D2D2D"/>
                 </a:solidFill>
@@ -9179,7 +9230,7 @@
               </a:spcAft>
             </a:pPr>
             <a:r>
-              <a:rPr sz="1100">
+              <a:rPr sz="1300">
                 <a:solidFill>
                   <a:srgbClr val="2D2D2D"/>
                 </a:solidFill>
@@ -9195,7 +9246,7 @@
               </a:spcAft>
             </a:pPr>
             <a:r>
-              <a:rPr sz="1100">
+              <a:rPr sz="1300">
                 <a:solidFill>
                   <a:srgbClr val="2D2D2D"/>
                 </a:solidFill>
@@ -9211,7 +9262,7 @@
               </a:spcAft>
             </a:pPr>
             <a:r>
-              <a:rPr sz="1100" i="1">
+              <a:rPr sz="1300" i="1">
                 <a:solidFill>
                   <a:srgbClr val="808080"/>
                 </a:solidFill>
@@ -9227,7 +9278,7 @@
               </a:spcAft>
             </a:pPr>
             <a:r>
-              <a:rPr sz="1100">
+              <a:rPr sz="1300">
                 <a:solidFill>
                   <a:srgbClr val="2D2D2D"/>
                 </a:solidFill>
@@ -9279,10 +9330,7 @@
           <a:lstStyle/>
           <a:p>
             <a:r>
-              <a:rPr sz="3200" b="1">
-                <a:solidFill>
-                  <a:srgbClr val="663399"/>
-                </a:solidFill>
+              <a:rPr sz="3200" b="1" dirty="0">
                 <a:latin typeface="Calibri"/>
               </a:rPr>
               <a:t>Session Summary</a:t>
@@ -9997,7 +10045,7 @@
                 </a:solidFill>
                 <a:latin typeface="Calibri"/>
               </a:rPr>
-              <a:t>Day-to-day operations (105 min)</a:t>
+              <a:t>Day-to-day operations </a:t>
             </a:r>
           </a:p>
         </p:txBody>
